--- a/public/fun/pack/pptx/birthday/돌잔치_18_사진중심_바닷가등대.pptx
+++ b/public/fun/pack/pptx/birthday/돌잔치_18_사진중심_바닷가등대.pptx
@@ -3286,14 +3286,6 @@
 <file path=ppt/slides/slide1.xml><?xml version="1.0" encoding="utf-8"?>
 <p:sld xmlns:a="http://schemas.openxmlformats.org/drawingml/2006/main" xmlns:p="http://schemas.openxmlformats.org/presentationml/2006/main" xmlns:r="http://schemas.openxmlformats.org/officeDocument/2006/relationships">
   <p:cSld>
-    <p:bg>
-      <p:bgPr>
-        <a:solidFill>
-          <a:srgbClr val="FFFFFF"/>
-        </a:solidFill>
-        <a:effectLst/>
-      </p:bgPr>
-    </p:bg>
     <p:spTree>
       <p:nvGrpSpPr>
         <p:cNvPr id="1" name=""/>
@@ -3301,151 +3293,30 @@
         <p:nvPr/>
       </p:nvGrpSpPr>
       <p:grpSpPr/>
-      <p:sp>
-        <p:nvSpPr>
-          <p:cNvPr id="3" name="장식"/>
-          <p:cNvSpPr/>
+      <p:pic>
+        <p:nvPicPr>
+          <p:cNvPr id="3" name="표지 그림" descr="birthday-18.jpg"/>
+          <p:cNvPicPr>
+            <a:picLocks noChangeAspect="1"/>
+          </p:cNvPicPr>
           <p:nvPr/>
-        </p:nvSpPr>
-        <p:spPr>
-          <a:xfrm>
-            <a:off x="0" y="2057400"/>
-            <a:ext cx="10241023" cy="1828800"/>
-          </a:xfrm>
-          <a:prstGeom prst="homePlate">
-            <a:avLst/>
-          </a:prstGeom>
-          <a:solidFill>
-            <a:srgbClr val="25799D"/>
-          </a:solidFill>
-          <a:ln>
-            <a:noFill/>
-          </a:ln>
-        </p:spPr>
-        <p:txBody>
-          <a:bodyPr rtlCol="0" anchor="ctr"/>
-          <a:lstStyle/>
-          <a:p>
-            <a:pPr algn="ctr"/>
-          </a:p>
-        </p:txBody>
-      </p:sp>
-      <p:sp>
-        <p:nvSpPr>
-          <p:cNvPr id="4" name="장식"/>
-          <p:cNvSpPr/>
-          <p:nvPr/>
-        </p:nvSpPr>
-        <p:spPr>
-          <a:xfrm>
-            <a:off x="0" y="3886200"/>
-            <a:ext cx="9509522" cy="64008"/>
+        </p:nvPicPr>
+        <p:blipFill>
+          <a:blip r:embed="rId2"/>
+          <a:stretch>
+            <a:fillRect/>
+          </a:stretch>
+        </p:blipFill>
+        <p:spPr>
+          <a:xfrm>
+            <a:off x="0" y="0"/>
+            <a:ext cx="12191695" cy="6858000"/>
           </a:xfrm>
           <a:prstGeom prst="rect">
             <a:avLst/>
           </a:prstGeom>
-          <a:solidFill>
-            <a:srgbClr val="913B4C"/>
-          </a:solidFill>
-          <a:ln>
-            <a:noFill/>
-          </a:ln>
-        </p:spPr>
-        <p:txBody>
-          <a:bodyPr rtlCol="0" anchor="ctr"/>
-          <a:lstStyle/>
-          <a:p>
-            <a:pPr algn="ctr"/>
-          </a:p>
-        </p:txBody>
-      </p:sp>
-      <p:sp>
-        <p:nvSpPr>
-          <p:cNvPr id="5" name="장식"/>
-          <p:cNvSpPr/>
-          <p:nvPr/>
-        </p:nvSpPr>
-        <p:spPr>
-          <a:xfrm>
-            <a:off x="9329659" y="672084"/>
-            <a:ext cx="2798064" cy="699516"/>
-          </a:xfrm>
-          <a:prstGeom prst="wave">
-            <a:avLst/>
-          </a:prstGeom>
-          <a:solidFill>
-            <a:srgbClr val="CCE9F5"/>
-          </a:solidFill>
-          <a:ln>
-            <a:noFill/>
-          </a:ln>
-        </p:spPr>
-        <p:txBody>
-          <a:bodyPr rtlCol="0" anchor="ctr"/>
-          <a:lstStyle/>
-          <a:p>
-            <a:pPr algn="ctr"/>
-          </a:p>
-        </p:txBody>
-      </p:sp>
-      <p:sp>
-        <p:nvSpPr>
-          <p:cNvPr id="6" name="장식"/>
-          <p:cNvSpPr/>
-          <p:nvPr/>
-        </p:nvSpPr>
-        <p:spPr>
-          <a:xfrm>
-            <a:off x="9329659" y="1278331"/>
-            <a:ext cx="2798064" cy="699516"/>
-          </a:xfrm>
-          <a:prstGeom prst="wave">
-            <a:avLst/>
-          </a:prstGeom>
-          <a:solidFill>
-            <a:srgbClr val="25799D"/>
-          </a:solidFill>
-          <a:ln>
-            <a:noFill/>
-          </a:ln>
-        </p:spPr>
-        <p:txBody>
-          <a:bodyPr rtlCol="0" anchor="ctr"/>
-          <a:lstStyle/>
-          <a:p>
-            <a:pPr algn="ctr"/>
-          </a:p>
-        </p:txBody>
-      </p:sp>
-      <p:sp>
-        <p:nvSpPr>
-          <p:cNvPr id="7" name="장식"/>
-          <p:cNvSpPr/>
-          <p:nvPr/>
-        </p:nvSpPr>
-        <p:spPr>
-          <a:xfrm>
-            <a:off x="9329659" y="1884578"/>
-            <a:ext cx="2798064" cy="699516"/>
-          </a:xfrm>
-          <a:prstGeom prst="wave">
-            <a:avLst/>
-          </a:prstGeom>
-          <a:solidFill>
-            <a:srgbClr val="913B4C"/>
-          </a:solidFill>
-          <a:ln>
-            <a:noFill/>
-          </a:ln>
-        </p:spPr>
-        <p:txBody>
-          <a:bodyPr rtlCol="0" anchor="ctr"/>
-          <a:lstStyle/>
-          <a:p>
-            <a:pPr algn="ctr"/>
-          </a:p>
-        </p:txBody>
-      </p:sp>
+        </p:spPr>
+      </p:pic>
       <p:sp>
         <p:nvSpPr>
           <p:cNvPr id="2" name="Title 1"/>
@@ -3458,8 +3329,8 @@
         </p:nvSpPr>
         <p:spPr>
           <a:xfrm>
-            <a:off x="731501" y="2167128"/>
-            <a:ext cx="8778020" cy="1609344"/>
+            <a:off x="853418" y="2057400"/>
+            <a:ext cx="6095847" cy="1554480"/>
           </a:xfrm>
         </p:spPr>
         <p:txBody>
@@ -3476,7 +3347,7 @@
             <a:r>
               <a:rPr sz="4000" b="1" i="0">
                 <a:solidFill>
-                  <a:srgbClr val="FFFFFF"/>
+                  <a:srgbClr val="11394A"/>
                 </a:solidFill>
               </a:rPr>
               <a:t>첫 번째 생일</a:t>
@@ -3486,14 +3357,14 @@
       </p:sp>
       <p:sp>
         <p:nvSpPr>
-          <p:cNvPr id="8" name="한 줄 문구"/>
+          <p:cNvPr id="4" name="한 줄 문구"/>
           <p:cNvSpPr txBox="1"/>
           <p:nvPr/>
         </p:nvSpPr>
         <p:spPr>
           <a:xfrm>
-            <a:off x="731501" y="4160520"/>
-            <a:ext cx="8534186" cy="822960"/>
+            <a:off x="853418" y="3749039"/>
+            <a:ext cx="6095847" cy="822960"/>
           </a:xfrm>
           <a:prstGeom prst="rect">
             <a:avLst/>
@@ -3517,21 +3388,21 @@
                   <a:srgbClr val="11394A"/>
                 </a:solidFill>
               </a:rPr>
-              <a:t>등대처럼 우리 가족을 비춰 준 아기</a:t>
-            </a:r>
-          </a:p>
-        </p:txBody>
-      </p:sp>
-      <p:sp>
-        <p:nvSpPr>
-          <p:cNvPr id="9" name="안내 문구"/>
+              <a:t>백일 사진과 지금 사진을 나란히 놓았습니다</a:t>
+            </a:r>
+          </a:p>
+        </p:txBody>
+      </p:sp>
+      <p:sp>
+        <p:nvSpPr>
+          <p:cNvPr id="5" name="안내 문구"/>
           <p:cNvSpPr txBox="1"/>
           <p:nvPr/>
         </p:nvSpPr>
         <p:spPr>
           <a:xfrm>
-            <a:off x="731501" y="5029200"/>
-            <a:ext cx="8534186" cy="914400"/>
+            <a:off x="853418" y="4617720"/>
+            <a:ext cx="6095847" cy="914400"/>
           </a:xfrm>
           <a:prstGeom prst="rect">
             <a:avLst/>
@@ -3555,7 +3426,7 @@
                   <a:srgbClr val="666666"/>
                 </a:solidFill>
               </a:rPr>
-              <a:t>아기 이름 · 2026. 00. 00</a:t>
+              <a:t>아기 이름 · 2027. 00. 00</a:t>
             </a:r>
           </a:p>
           <a:p>
@@ -3632,93 +3503,6 @@
       </p:sp>
       <p:sp>
         <p:nvSpPr>
-          <p:cNvPr id="4" name="장식"/>
-          <p:cNvSpPr/>
-          <p:nvPr/>
-        </p:nvSpPr>
-        <p:spPr>
-          <a:xfrm>
-            <a:off x="10719511" y="475488"/>
-            <a:ext cx="1207008" cy="301752"/>
-          </a:xfrm>
-          <a:prstGeom prst="wave">
-            <a:avLst/>
-          </a:prstGeom>
-          <a:solidFill>
-            <a:srgbClr val="CCE9F5"/>
-          </a:solidFill>
-          <a:ln>
-            <a:noFill/>
-          </a:ln>
-        </p:spPr>
-        <p:txBody>
-          <a:bodyPr rtlCol="0" anchor="ctr"/>
-          <a:lstStyle/>
-          <a:p>
-            <a:pPr algn="ctr"/>
-          </a:p>
-        </p:txBody>
-      </p:sp>
-      <p:sp>
-        <p:nvSpPr>
-          <p:cNvPr id="5" name="장식"/>
-          <p:cNvSpPr/>
-          <p:nvPr/>
-        </p:nvSpPr>
-        <p:spPr>
-          <a:xfrm>
-            <a:off x="10719511" y="737006"/>
-            <a:ext cx="1207008" cy="301752"/>
-          </a:xfrm>
-          <a:prstGeom prst="wave">
-            <a:avLst/>
-          </a:prstGeom>
-          <a:solidFill>
-            <a:srgbClr val="25799D"/>
-          </a:solidFill>
-          <a:ln>
-            <a:noFill/>
-          </a:ln>
-        </p:spPr>
-        <p:txBody>
-          <a:bodyPr rtlCol="0" anchor="ctr"/>
-          <a:lstStyle/>
-          <a:p>
-            <a:pPr algn="ctr"/>
-          </a:p>
-        </p:txBody>
-      </p:sp>
-      <p:sp>
-        <p:nvSpPr>
-          <p:cNvPr id="6" name="장식"/>
-          <p:cNvSpPr/>
-          <p:nvPr/>
-        </p:nvSpPr>
-        <p:spPr>
-          <a:xfrm>
-            <a:off x="10719511" y="998524"/>
-            <a:ext cx="1207008" cy="301752"/>
-          </a:xfrm>
-          <a:prstGeom prst="wave">
-            <a:avLst/>
-          </a:prstGeom>
-          <a:solidFill>
-            <a:srgbClr val="913B4C"/>
-          </a:solidFill>
-          <a:ln>
-            <a:noFill/>
-          </a:ln>
-        </p:spPr>
-        <p:txBody>
-          <a:bodyPr rtlCol="0" anchor="ctr"/>
-          <a:lstStyle/>
-          <a:p>
-            <a:pPr algn="ctr"/>
-          </a:p>
-        </p:txBody>
-      </p:sp>
-      <p:sp>
-        <p:nvSpPr>
           <p:cNvPr id="2" name="Title 1"/>
           <p:cNvSpPr>
             <a:spLocks noGrp="1"/>
@@ -3757,7 +3541,7 @@
       </p:sp>
       <p:sp>
         <p:nvSpPr>
-          <p:cNvPr id="7" name="사진 자리"/>
+          <p:cNvPr id="4" name="사진 자리"/>
           <p:cNvSpPr/>
           <p:nvPr/>
         </p:nvSpPr>
@@ -3805,7 +3589,7 @@
       </p:sp>
       <p:graphicFrame>
         <p:nvGraphicFramePr>
-          <p:cNvPr id="8" name="표"/>
+          <p:cNvPr id="5" name="표"/>
           <p:cNvGraphicFramePr>
             <a:graphicFrameLocks noGrp="1"/>
           </p:cNvGraphicFramePr>
@@ -4450,93 +4234,6 @@
       </p:sp>
       <p:sp>
         <p:nvSpPr>
-          <p:cNvPr id="4" name="장식"/>
-          <p:cNvSpPr/>
-          <p:nvPr/>
-        </p:nvSpPr>
-        <p:spPr>
-          <a:xfrm>
-            <a:off x="10719511" y="475488"/>
-            <a:ext cx="1207008" cy="301752"/>
-          </a:xfrm>
-          <a:prstGeom prst="wave">
-            <a:avLst/>
-          </a:prstGeom>
-          <a:solidFill>
-            <a:srgbClr val="CCE9F5"/>
-          </a:solidFill>
-          <a:ln>
-            <a:noFill/>
-          </a:ln>
-        </p:spPr>
-        <p:txBody>
-          <a:bodyPr rtlCol="0" anchor="ctr"/>
-          <a:lstStyle/>
-          <a:p>
-            <a:pPr algn="ctr"/>
-          </a:p>
-        </p:txBody>
-      </p:sp>
-      <p:sp>
-        <p:nvSpPr>
-          <p:cNvPr id="5" name="장식"/>
-          <p:cNvSpPr/>
-          <p:nvPr/>
-        </p:nvSpPr>
-        <p:spPr>
-          <a:xfrm>
-            <a:off x="10719511" y="737006"/>
-            <a:ext cx="1207008" cy="301752"/>
-          </a:xfrm>
-          <a:prstGeom prst="wave">
-            <a:avLst/>
-          </a:prstGeom>
-          <a:solidFill>
-            <a:srgbClr val="25799D"/>
-          </a:solidFill>
-          <a:ln>
-            <a:noFill/>
-          </a:ln>
-        </p:spPr>
-        <p:txBody>
-          <a:bodyPr rtlCol="0" anchor="ctr"/>
-          <a:lstStyle/>
-          <a:p>
-            <a:pPr algn="ctr"/>
-          </a:p>
-        </p:txBody>
-      </p:sp>
-      <p:sp>
-        <p:nvSpPr>
-          <p:cNvPr id="6" name="장식"/>
-          <p:cNvSpPr/>
-          <p:nvPr/>
-        </p:nvSpPr>
-        <p:spPr>
-          <a:xfrm>
-            <a:off x="10719511" y="998524"/>
-            <a:ext cx="1207008" cy="301752"/>
-          </a:xfrm>
-          <a:prstGeom prst="wave">
-            <a:avLst/>
-          </a:prstGeom>
-          <a:solidFill>
-            <a:srgbClr val="913B4C"/>
-          </a:solidFill>
-          <a:ln>
-            <a:noFill/>
-          </a:ln>
-        </p:spPr>
-        <p:txBody>
-          <a:bodyPr rtlCol="0" anchor="ctr"/>
-          <a:lstStyle/>
-          <a:p>
-            <a:pPr algn="ctr"/>
-          </a:p>
-        </p:txBody>
-      </p:sp>
-      <p:sp>
-        <p:nvSpPr>
           <p:cNvPr id="2" name="Title 1"/>
           <p:cNvSpPr>
             <a:spLocks noGrp="1"/>
@@ -4575,7 +4272,7 @@
       </p:sp>
       <p:sp>
         <p:nvSpPr>
-          <p:cNvPr id="7" name="사진 자리"/>
+          <p:cNvPr id="4" name="사진 자리"/>
           <p:cNvSpPr/>
           <p:nvPr/>
         </p:nvSpPr>
@@ -4623,7 +4320,7 @@
       </p:sp>
       <p:sp>
         <p:nvSpPr>
-          <p:cNvPr id="8" name="사진 자리"/>
+          <p:cNvPr id="5" name="사진 자리"/>
           <p:cNvSpPr/>
           <p:nvPr/>
         </p:nvSpPr>
@@ -4726,93 +4423,6 @@
       </p:sp>
       <p:sp>
         <p:nvSpPr>
-          <p:cNvPr id="4" name="장식"/>
-          <p:cNvSpPr/>
-          <p:nvPr/>
-        </p:nvSpPr>
-        <p:spPr>
-          <a:xfrm>
-            <a:off x="10719511" y="475488"/>
-            <a:ext cx="1207008" cy="301752"/>
-          </a:xfrm>
-          <a:prstGeom prst="wave">
-            <a:avLst/>
-          </a:prstGeom>
-          <a:solidFill>
-            <a:srgbClr val="CCE9F5"/>
-          </a:solidFill>
-          <a:ln>
-            <a:noFill/>
-          </a:ln>
-        </p:spPr>
-        <p:txBody>
-          <a:bodyPr rtlCol="0" anchor="ctr"/>
-          <a:lstStyle/>
-          <a:p>
-            <a:pPr algn="ctr"/>
-          </a:p>
-        </p:txBody>
-      </p:sp>
-      <p:sp>
-        <p:nvSpPr>
-          <p:cNvPr id="5" name="장식"/>
-          <p:cNvSpPr/>
-          <p:nvPr/>
-        </p:nvSpPr>
-        <p:spPr>
-          <a:xfrm>
-            <a:off x="10719511" y="737006"/>
-            <a:ext cx="1207008" cy="301752"/>
-          </a:xfrm>
-          <a:prstGeom prst="wave">
-            <a:avLst/>
-          </a:prstGeom>
-          <a:solidFill>
-            <a:srgbClr val="25799D"/>
-          </a:solidFill>
-          <a:ln>
-            <a:noFill/>
-          </a:ln>
-        </p:spPr>
-        <p:txBody>
-          <a:bodyPr rtlCol="0" anchor="ctr"/>
-          <a:lstStyle/>
-          <a:p>
-            <a:pPr algn="ctr"/>
-          </a:p>
-        </p:txBody>
-      </p:sp>
-      <p:sp>
-        <p:nvSpPr>
-          <p:cNvPr id="6" name="장식"/>
-          <p:cNvSpPr/>
-          <p:nvPr/>
-        </p:nvSpPr>
-        <p:spPr>
-          <a:xfrm>
-            <a:off x="10719511" y="998524"/>
-            <a:ext cx="1207008" cy="301752"/>
-          </a:xfrm>
-          <a:prstGeom prst="wave">
-            <a:avLst/>
-          </a:prstGeom>
-          <a:solidFill>
-            <a:srgbClr val="913B4C"/>
-          </a:solidFill>
-          <a:ln>
-            <a:noFill/>
-          </a:ln>
-        </p:spPr>
-        <p:txBody>
-          <a:bodyPr rtlCol="0" anchor="ctr"/>
-          <a:lstStyle/>
-          <a:p>
-            <a:pPr algn="ctr"/>
-          </a:p>
-        </p:txBody>
-      </p:sp>
-      <p:sp>
-        <p:nvSpPr>
           <p:cNvPr id="2" name="Title 1"/>
           <p:cNvSpPr>
             <a:spLocks noGrp="1"/>
@@ -4851,7 +4461,7 @@
       </p:sp>
       <p:sp>
         <p:nvSpPr>
-          <p:cNvPr id="7" name="사진 자리"/>
+          <p:cNvPr id="4" name="사진 자리"/>
           <p:cNvSpPr/>
           <p:nvPr/>
         </p:nvSpPr>
@@ -4899,7 +4509,7 @@
       </p:sp>
       <p:sp>
         <p:nvSpPr>
-          <p:cNvPr id="8" name="사진 자리"/>
+          <p:cNvPr id="5" name="사진 자리"/>
           <p:cNvSpPr/>
           <p:nvPr/>
         </p:nvSpPr>
@@ -4947,7 +4557,7 @@
       </p:sp>
       <p:sp>
         <p:nvSpPr>
-          <p:cNvPr id="9" name="사진 자리"/>
+          <p:cNvPr id="6" name="사진 자리"/>
           <p:cNvSpPr/>
           <p:nvPr/>
         </p:nvSpPr>
@@ -4995,7 +4605,7 @@
       </p:sp>
       <p:sp>
         <p:nvSpPr>
-          <p:cNvPr id="10" name="사진 자리"/>
+          <p:cNvPr id="7" name="사진 자리"/>
           <p:cNvSpPr/>
           <p:nvPr/>
         </p:nvSpPr>
@@ -5043,7 +4653,7 @@
       </p:sp>
       <p:sp>
         <p:nvSpPr>
-          <p:cNvPr id="11" name="사진 자리"/>
+          <p:cNvPr id="8" name="사진 자리"/>
           <p:cNvSpPr/>
           <p:nvPr/>
         </p:nvSpPr>
@@ -5091,7 +4701,7 @@
       </p:sp>
       <p:sp>
         <p:nvSpPr>
-          <p:cNvPr id="12" name="사진 자리"/>
+          <p:cNvPr id="9" name="사진 자리"/>
           <p:cNvSpPr/>
           <p:nvPr/>
         </p:nvSpPr>
@@ -5194,93 +4804,6 @@
       </p:sp>
       <p:sp>
         <p:nvSpPr>
-          <p:cNvPr id="4" name="장식"/>
-          <p:cNvSpPr/>
-          <p:nvPr/>
-        </p:nvSpPr>
-        <p:spPr>
-          <a:xfrm>
-            <a:off x="10719511" y="475488"/>
-            <a:ext cx="1207008" cy="301752"/>
-          </a:xfrm>
-          <a:prstGeom prst="wave">
-            <a:avLst/>
-          </a:prstGeom>
-          <a:solidFill>
-            <a:srgbClr val="CCE9F5"/>
-          </a:solidFill>
-          <a:ln>
-            <a:noFill/>
-          </a:ln>
-        </p:spPr>
-        <p:txBody>
-          <a:bodyPr rtlCol="0" anchor="ctr"/>
-          <a:lstStyle/>
-          <a:p>
-            <a:pPr algn="ctr"/>
-          </a:p>
-        </p:txBody>
-      </p:sp>
-      <p:sp>
-        <p:nvSpPr>
-          <p:cNvPr id="5" name="장식"/>
-          <p:cNvSpPr/>
-          <p:nvPr/>
-        </p:nvSpPr>
-        <p:spPr>
-          <a:xfrm>
-            <a:off x="10719511" y="737006"/>
-            <a:ext cx="1207008" cy="301752"/>
-          </a:xfrm>
-          <a:prstGeom prst="wave">
-            <a:avLst/>
-          </a:prstGeom>
-          <a:solidFill>
-            <a:srgbClr val="25799D"/>
-          </a:solidFill>
-          <a:ln>
-            <a:noFill/>
-          </a:ln>
-        </p:spPr>
-        <p:txBody>
-          <a:bodyPr rtlCol="0" anchor="ctr"/>
-          <a:lstStyle/>
-          <a:p>
-            <a:pPr algn="ctr"/>
-          </a:p>
-        </p:txBody>
-      </p:sp>
-      <p:sp>
-        <p:nvSpPr>
-          <p:cNvPr id="6" name="장식"/>
-          <p:cNvSpPr/>
-          <p:nvPr/>
-        </p:nvSpPr>
-        <p:spPr>
-          <a:xfrm>
-            <a:off x="10719511" y="998524"/>
-            <a:ext cx="1207008" cy="301752"/>
-          </a:xfrm>
-          <a:prstGeom prst="wave">
-            <a:avLst/>
-          </a:prstGeom>
-          <a:solidFill>
-            <a:srgbClr val="913B4C"/>
-          </a:solidFill>
-          <a:ln>
-            <a:noFill/>
-          </a:ln>
-        </p:spPr>
-        <p:txBody>
-          <a:bodyPr rtlCol="0" anchor="ctr"/>
-          <a:lstStyle/>
-          <a:p>
-            <a:pPr algn="ctr"/>
-          </a:p>
-        </p:txBody>
-      </p:sp>
-      <p:sp>
-        <p:nvSpPr>
           <p:cNvPr id="2" name="Title 1"/>
           <p:cNvSpPr>
             <a:spLocks noGrp="1"/>
@@ -5319,7 +4842,7 @@
       </p:sp>
       <p:sp>
         <p:nvSpPr>
-          <p:cNvPr id="7" name="사진 자리"/>
+          <p:cNvPr id="4" name="사진 자리"/>
           <p:cNvSpPr/>
           <p:nvPr/>
         </p:nvSpPr>
@@ -5367,7 +4890,7 @@
       </p:sp>
       <p:sp>
         <p:nvSpPr>
-          <p:cNvPr id="8" name="사진 자리"/>
+          <p:cNvPr id="5" name="사진 자리"/>
           <p:cNvSpPr/>
           <p:nvPr/>
         </p:nvSpPr>
@@ -5415,7 +4938,7 @@
       </p:sp>
       <p:sp>
         <p:nvSpPr>
-          <p:cNvPr id="9" name="사진 자리"/>
+          <p:cNvPr id="6" name="사진 자리"/>
           <p:cNvSpPr/>
           <p:nvPr/>
         </p:nvSpPr>
@@ -5463,7 +4986,7 @@
       </p:sp>
       <p:sp>
         <p:nvSpPr>
-          <p:cNvPr id="10" name="사진 자리"/>
+          <p:cNvPr id="7" name="사진 자리"/>
           <p:cNvSpPr/>
           <p:nvPr/>
         </p:nvSpPr>
@@ -5511,7 +5034,7 @@
       </p:sp>
       <p:sp>
         <p:nvSpPr>
-          <p:cNvPr id="11" name="사진 자리"/>
+          <p:cNvPr id="8" name="사진 자리"/>
           <p:cNvSpPr/>
           <p:nvPr/>
         </p:nvSpPr>
@@ -5559,7 +5082,7 @@
       </p:sp>
       <p:sp>
         <p:nvSpPr>
-          <p:cNvPr id="12" name="사진 자리"/>
+          <p:cNvPr id="9" name="사진 자리"/>
           <p:cNvSpPr/>
           <p:nvPr/>
         </p:nvSpPr>
@@ -5607,7 +5130,7 @@
       </p:sp>
       <p:sp>
         <p:nvSpPr>
-          <p:cNvPr id="13" name="사진 자리"/>
+          <p:cNvPr id="10" name="사진 자리"/>
           <p:cNvSpPr/>
           <p:nvPr/>
         </p:nvSpPr>
@@ -5655,7 +5178,7 @@
       </p:sp>
       <p:sp>
         <p:nvSpPr>
-          <p:cNvPr id="14" name="사진 자리"/>
+          <p:cNvPr id="11" name="사진 자리"/>
           <p:cNvSpPr/>
           <p:nvPr/>
         </p:nvSpPr>
@@ -5712,14 +5235,6 @@
 <file path=ppt/slides/slide6.xml><?xml version="1.0" encoding="utf-8"?>
 <p:sld xmlns:a="http://schemas.openxmlformats.org/drawingml/2006/main" xmlns:p="http://schemas.openxmlformats.org/presentationml/2006/main" xmlns:r="http://schemas.openxmlformats.org/officeDocument/2006/relationships">
   <p:cSld>
-    <p:bg>
-      <p:bgPr>
-        <a:solidFill>
-          <a:srgbClr val="FFFFFF"/>
-        </a:solidFill>
-        <a:effectLst/>
-      </p:bgPr>
-    </p:bg>
     <p:spTree>
       <p:nvGrpSpPr>
         <p:cNvPr id="1" name=""/>
@@ -5727,151 +5242,30 @@
         <p:nvPr/>
       </p:nvGrpSpPr>
       <p:grpSpPr/>
-      <p:sp>
-        <p:nvSpPr>
-          <p:cNvPr id="3" name="장식"/>
-          <p:cNvSpPr/>
+      <p:pic>
+        <p:nvPicPr>
+          <p:cNvPr id="3" name="표지 그림" descr="birthday-18.jpg"/>
+          <p:cNvPicPr>
+            <a:picLocks noChangeAspect="1"/>
+          </p:cNvPicPr>
           <p:nvPr/>
-        </p:nvSpPr>
-        <p:spPr>
-          <a:xfrm>
-            <a:off x="0" y="2057400"/>
-            <a:ext cx="10241023" cy="1828800"/>
-          </a:xfrm>
-          <a:prstGeom prst="homePlate">
-            <a:avLst/>
-          </a:prstGeom>
-          <a:solidFill>
-            <a:srgbClr val="25799D"/>
-          </a:solidFill>
-          <a:ln>
-            <a:noFill/>
-          </a:ln>
-        </p:spPr>
-        <p:txBody>
-          <a:bodyPr rtlCol="0" anchor="ctr"/>
-          <a:lstStyle/>
-          <a:p>
-            <a:pPr algn="ctr"/>
-          </a:p>
-        </p:txBody>
-      </p:sp>
-      <p:sp>
-        <p:nvSpPr>
-          <p:cNvPr id="4" name="장식"/>
-          <p:cNvSpPr/>
-          <p:nvPr/>
-        </p:nvSpPr>
-        <p:spPr>
-          <a:xfrm>
-            <a:off x="0" y="3886200"/>
-            <a:ext cx="9509522" cy="64008"/>
+        </p:nvPicPr>
+        <p:blipFill>
+          <a:blip r:embed="rId2"/>
+          <a:stretch>
+            <a:fillRect/>
+          </a:stretch>
+        </p:blipFill>
+        <p:spPr>
+          <a:xfrm>
+            <a:off x="0" y="0"/>
+            <a:ext cx="12191695" cy="6858000"/>
           </a:xfrm>
           <a:prstGeom prst="rect">
             <a:avLst/>
           </a:prstGeom>
-          <a:solidFill>
-            <a:srgbClr val="913B4C"/>
-          </a:solidFill>
-          <a:ln>
-            <a:noFill/>
-          </a:ln>
-        </p:spPr>
-        <p:txBody>
-          <a:bodyPr rtlCol="0" anchor="ctr"/>
-          <a:lstStyle/>
-          <a:p>
-            <a:pPr algn="ctr"/>
-          </a:p>
-        </p:txBody>
-      </p:sp>
-      <p:sp>
-        <p:nvSpPr>
-          <p:cNvPr id="5" name="장식"/>
-          <p:cNvSpPr/>
-          <p:nvPr/>
-        </p:nvSpPr>
-        <p:spPr>
-          <a:xfrm>
-            <a:off x="9329659" y="672084"/>
-            <a:ext cx="2798064" cy="699516"/>
-          </a:xfrm>
-          <a:prstGeom prst="wave">
-            <a:avLst/>
-          </a:prstGeom>
-          <a:solidFill>
-            <a:srgbClr val="CCE9F5"/>
-          </a:solidFill>
-          <a:ln>
-            <a:noFill/>
-          </a:ln>
-        </p:spPr>
-        <p:txBody>
-          <a:bodyPr rtlCol="0" anchor="ctr"/>
-          <a:lstStyle/>
-          <a:p>
-            <a:pPr algn="ctr"/>
-          </a:p>
-        </p:txBody>
-      </p:sp>
-      <p:sp>
-        <p:nvSpPr>
-          <p:cNvPr id="6" name="장식"/>
-          <p:cNvSpPr/>
-          <p:nvPr/>
-        </p:nvSpPr>
-        <p:spPr>
-          <a:xfrm>
-            <a:off x="9329659" y="1278331"/>
-            <a:ext cx="2798064" cy="699516"/>
-          </a:xfrm>
-          <a:prstGeom prst="wave">
-            <a:avLst/>
-          </a:prstGeom>
-          <a:solidFill>
-            <a:srgbClr val="25799D"/>
-          </a:solidFill>
-          <a:ln>
-            <a:noFill/>
-          </a:ln>
-        </p:spPr>
-        <p:txBody>
-          <a:bodyPr rtlCol="0" anchor="ctr"/>
-          <a:lstStyle/>
-          <a:p>
-            <a:pPr algn="ctr"/>
-          </a:p>
-        </p:txBody>
-      </p:sp>
-      <p:sp>
-        <p:nvSpPr>
-          <p:cNvPr id="7" name="장식"/>
-          <p:cNvSpPr/>
-          <p:nvPr/>
-        </p:nvSpPr>
-        <p:spPr>
-          <a:xfrm>
-            <a:off x="9329659" y="1884578"/>
-            <a:ext cx="2798064" cy="699516"/>
-          </a:xfrm>
-          <a:prstGeom prst="wave">
-            <a:avLst/>
-          </a:prstGeom>
-          <a:solidFill>
-            <a:srgbClr val="913B4C"/>
-          </a:solidFill>
-          <a:ln>
-            <a:noFill/>
-          </a:ln>
-        </p:spPr>
-        <p:txBody>
-          <a:bodyPr rtlCol="0" anchor="ctr"/>
-          <a:lstStyle/>
-          <a:p>
-            <a:pPr algn="ctr"/>
-          </a:p>
-        </p:txBody>
-      </p:sp>
+        </p:spPr>
+      </p:pic>
       <p:sp>
         <p:nvSpPr>
           <p:cNvPr id="2" name="Title 1"/>
@@ -5884,8 +5278,8 @@
         </p:nvSpPr>
         <p:spPr>
           <a:xfrm>
-            <a:off x="731501" y="2167128"/>
-            <a:ext cx="8778020" cy="1609344"/>
+            <a:off x="853418" y="2057400"/>
+            <a:ext cx="6095847" cy="1554480"/>
           </a:xfrm>
         </p:spPr>
         <p:txBody>
@@ -5902,24 +5296,24 @@
             <a:r>
               <a:rPr sz="3400" b="1" i="0">
                 <a:solidFill>
-                  <a:srgbClr val="FFFFFF"/>
+                  <a:srgbClr val="11394A"/>
                 </a:solidFill>
               </a:rPr>
-              <a:t>함께해 주셔서 감사합니다</a:t>
-            </a:r>
-          </a:p>
-        </p:txBody>
-      </p:sp>
-      <p:sp>
-        <p:nvSpPr>
-          <p:cNvPr id="8" name="한 줄 문구"/>
+              <a:t>와 주셔서 고맙습니다</a:t>
+            </a:r>
+          </a:p>
+        </p:txBody>
+      </p:sp>
+      <p:sp>
+        <p:nvSpPr>
+          <p:cNvPr id="4" name="한 줄 문구"/>
           <p:cNvSpPr txBox="1"/>
           <p:nvPr/>
         </p:nvSpPr>
         <p:spPr>
           <a:xfrm>
-            <a:off x="731501" y="4160520"/>
-            <a:ext cx="8534186" cy="822960"/>
+            <a:off x="853418" y="3749039"/>
+            <a:ext cx="6095847" cy="822960"/>
           </a:xfrm>
           <a:prstGeom prst="rect">
             <a:avLst/>
@@ -5943,21 +5337,21 @@
                   <a:srgbClr val="11394A"/>
                 </a:solidFill>
               </a:rPr>
-              <a:t>첫 번째 생일을 축하해 주셔서 고맙습니다</a:t>
-            </a:r>
-          </a:p>
-        </p:txBody>
-      </p:sp>
-      <p:sp>
-        <p:nvSpPr>
-          <p:cNvPr id="9" name="안내 문구"/>
+              <a:t>아이가 한 살이 되었습니다</a:t>
+            </a:r>
+          </a:p>
+        </p:txBody>
+      </p:sp>
+      <p:sp>
+        <p:nvSpPr>
+          <p:cNvPr id="5" name="안내 문구"/>
           <p:cNvSpPr txBox="1"/>
           <p:nvPr/>
         </p:nvSpPr>
         <p:spPr>
           <a:xfrm>
-            <a:off x="731501" y="5029200"/>
-            <a:ext cx="8534186" cy="914400"/>
+            <a:off x="853418" y="4617720"/>
+            <a:ext cx="6095847" cy="914400"/>
           </a:xfrm>
           <a:prstGeom prst="rect">
             <a:avLst/>

--- a/public/fun/pack/pptx/birthday/돌잔치_18_사진중심_바닷가등대.pptx
+++ b/public/fun/pack/pptx/birthday/돌잔치_18_사진중심_바닷가등대.pptx
@@ -3347,7 +3347,7 @@
             <a:r>
               <a:rPr sz="4000" b="1" i="0">
                 <a:solidFill>
-                  <a:srgbClr val="11394A"/>
+                  <a:srgbClr val="11485F"/>
                 </a:solidFill>
               </a:rPr>
               <a:t>첫 번째 생일</a:t>
@@ -3385,7 +3385,7 @@
             <a:r>
               <a:rPr sz="1700" b="0" i="1">
                 <a:solidFill>
-                  <a:srgbClr val="11394A"/>
+                  <a:srgbClr val="11485F"/>
                 </a:solidFill>
               </a:rPr>
               <a:t>백일 사진과 지금 사진을 나란히 놓았습니다</a:t>
@@ -3487,7 +3487,7 @@
             <a:avLst/>
           </a:prstGeom>
           <a:solidFill>
-            <a:srgbClr val="25799D"/>
+            <a:srgbClr val="2695C5"/>
           </a:solidFill>
           <a:ln>
             <a:noFill/>
@@ -3556,11 +3556,11 @@
             </a:avLst>
           </a:prstGeom>
           <a:solidFill>
-            <a:srgbClr val="CCE9F5"/>
+            <a:srgbClr val="D1EEFA"/>
           </a:solidFill>
           <a:ln w="19050">
             <a:solidFill>
-              <a:srgbClr val="25799D"/>
+              <a:srgbClr val="2695C5"/>
             </a:solidFill>
             <a:prstDash val="dash"/>
           </a:ln>
@@ -3579,7 +3579,7 @@
             <a:r>
               <a:rPr sz="1400" b="0" i="0">
                 <a:solidFill>
-                  <a:srgbClr val="11394A"/>
+                  <a:srgbClr val="11485F"/>
                 </a:solidFill>
               </a:rPr>
               <a:t>아기 사진을 넣어 주세요</a:t>
@@ -3619,7 +3619,7 @@
                       <a:r>
                         <a:rPr sz="1500" b="1">
                           <a:solidFill>
-                            <a:srgbClr val="11394A"/>
+                            <a:srgbClr val="11485F"/>
                           </a:solidFill>
                         </a:rPr>
                         <a:t>이름</a:t>
@@ -3629,30 +3629,30 @@
                   <a:tcPr anchor="ctr" marL="73152" marR="73152">
                     <a:lnL w="9525" cap="flat" cmpd="sng" algn="ctr">
                       <a:solidFill>
-                        <a:srgbClr val="CCE9F5"/>
+                        <a:srgbClr val="D1EEFA"/>
                       </a:solidFill>
                       <a:prstDash val="solid"/>
                     </a:lnL>
                     <a:lnR w="9525" cap="flat" cmpd="sng" algn="ctr">
                       <a:solidFill>
-                        <a:srgbClr val="CCE9F5"/>
+                        <a:srgbClr val="D1EEFA"/>
                       </a:solidFill>
                       <a:prstDash val="solid"/>
                     </a:lnR>
                     <a:lnT w="9525" cap="flat" cmpd="sng" algn="ctr">
                       <a:solidFill>
-                        <a:srgbClr val="CCE9F5"/>
+                        <a:srgbClr val="D1EEFA"/>
                       </a:solidFill>
                       <a:prstDash val="solid"/>
                     </a:lnT>
                     <a:lnB w="9525" cap="flat" cmpd="sng" algn="ctr">
                       <a:solidFill>
-                        <a:srgbClr val="CCE9F5"/>
+                        <a:srgbClr val="D1EEFA"/>
                       </a:solidFill>
                       <a:prstDash val="solid"/>
                     </a:lnB>
                     <a:solidFill>
-                      <a:srgbClr val="CCE9F5"/>
+                      <a:srgbClr val="D1EEFA"/>
                     </a:solidFill>
                   </a:tcPr>
                 </a:tc>
@@ -3675,30 +3675,30 @@
                   <a:tcPr anchor="ctr" marL="73152" marR="73152">
                     <a:lnL w="9525" cap="flat" cmpd="sng" algn="ctr">
                       <a:solidFill>
-                        <a:srgbClr val="CCE9F5"/>
+                        <a:srgbClr val="D1EEFA"/>
                       </a:solidFill>
                       <a:prstDash val="solid"/>
                     </a:lnL>
                     <a:lnR w="9525" cap="flat" cmpd="sng" algn="ctr">
                       <a:solidFill>
-                        <a:srgbClr val="CCE9F5"/>
+                        <a:srgbClr val="D1EEFA"/>
                       </a:solidFill>
                       <a:prstDash val="solid"/>
                     </a:lnR>
                     <a:lnT w="9525" cap="flat" cmpd="sng" algn="ctr">
                       <a:solidFill>
-                        <a:srgbClr val="CCE9F5"/>
+                        <a:srgbClr val="D1EEFA"/>
                       </a:solidFill>
                       <a:prstDash val="solid"/>
                     </a:lnT>
                     <a:lnB w="9525" cap="flat" cmpd="sng" algn="ctr">
                       <a:solidFill>
-                        <a:srgbClr val="CCE9F5"/>
+                        <a:srgbClr val="D1EEFA"/>
                       </a:solidFill>
                       <a:prstDash val="solid"/>
                     </a:lnB>
                     <a:solidFill>
-                      <a:srgbClr val="EEF7FB"/>
+                      <a:srgbClr val="EEF8FC"/>
                     </a:solidFill>
                   </a:tcPr>
                 </a:tc>
@@ -3713,7 +3713,7 @@
                       <a:r>
                         <a:rPr sz="1500" b="1">
                           <a:solidFill>
-                            <a:srgbClr val="11394A"/>
+                            <a:srgbClr val="11485F"/>
                           </a:solidFill>
                         </a:rPr>
                         <a:t>생일</a:t>
@@ -3723,30 +3723,30 @@
                   <a:tcPr anchor="ctr" marL="73152" marR="73152">
                     <a:lnL w="9525" cap="flat" cmpd="sng" algn="ctr">
                       <a:solidFill>
-                        <a:srgbClr val="CCE9F5"/>
+                        <a:srgbClr val="D1EEFA"/>
                       </a:solidFill>
                       <a:prstDash val="solid"/>
                     </a:lnL>
                     <a:lnR w="9525" cap="flat" cmpd="sng" algn="ctr">
                       <a:solidFill>
-                        <a:srgbClr val="CCE9F5"/>
+                        <a:srgbClr val="D1EEFA"/>
                       </a:solidFill>
                       <a:prstDash val="solid"/>
                     </a:lnR>
                     <a:lnT w="9525" cap="flat" cmpd="sng" algn="ctr">
                       <a:solidFill>
-                        <a:srgbClr val="CCE9F5"/>
+                        <a:srgbClr val="D1EEFA"/>
                       </a:solidFill>
                       <a:prstDash val="solid"/>
                     </a:lnT>
                     <a:lnB w="9525" cap="flat" cmpd="sng" algn="ctr">
                       <a:solidFill>
-                        <a:srgbClr val="CCE9F5"/>
+                        <a:srgbClr val="D1EEFA"/>
                       </a:solidFill>
                       <a:prstDash val="solid"/>
                     </a:lnB>
                     <a:solidFill>
-                      <a:srgbClr val="CCE9F5"/>
+                      <a:srgbClr val="D1EEFA"/>
                     </a:solidFill>
                   </a:tcPr>
                 </a:tc>
@@ -3769,25 +3769,25 @@
                   <a:tcPr anchor="ctr" marL="73152" marR="73152">
                     <a:lnL w="9525" cap="flat" cmpd="sng" algn="ctr">
                       <a:solidFill>
-                        <a:srgbClr val="CCE9F5"/>
+                        <a:srgbClr val="D1EEFA"/>
                       </a:solidFill>
                       <a:prstDash val="solid"/>
                     </a:lnL>
                     <a:lnR w="9525" cap="flat" cmpd="sng" algn="ctr">
                       <a:solidFill>
-                        <a:srgbClr val="CCE9F5"/>
+                        <a:srgbClr val="D1EEFA"/>
                       </a:solidFill>
                       <a:prstDash val="solid"/>
                     </a:lnR>
                     <a:lnT w="9525" cap="flat" cmpd="sng" algn="ctr">
                       <a:solidFill>
-                        <a:srgbClr val="CCE9F5"/>
+                        <a:srgbClr val="D1EEFA"/>
                       </a:solidFill>
                       <a:prstDash val="solid"/>
                     </a:lnT>
                     <a:lnB w="9525" cap="flat" cmpd="sng" algn="ctr">
                       <a:solidFill>
-                        <a:srgbClr val="CCE9F5"/>
+                        <a:srgbClr val="D1EEFA"/>
                       </a:solidFill>
                       <a:prstDash val="solid"/>
                     </a:lnB>
@@ -3807,7 +3807,7 @@
                       <a:r>
                         <a:rPr sz="1500" b="1">
                           <a:solidFill>
-                            <a:srgbClr val="11394A"/>
+                            <a:srgbClr val="11485F"/>
                           </a:solidFill>
                         </a:rPr>
                         <a:t>키 · 몸무게</a:t>
@@ -3817,30 +3817,30 @@
                   <a:tcPr anchor="ctr" marL="73152" marR="73152">
                     <a:lnL w="9525" cap="flat" cmpd="sng" algn="ctr">
                       <a:solidFill>
-                        <a:srgbClr val="CCE9F5"/>
+                        <a:srgbClr val="D1EEFA"/>
                       </a:solidFill>
                       <a:prstDash val="solid"/>
                     </a:lnL>
                     <a:lnR w="9525" cap="flat" cmpd="sng" algn="ctr">
                       <a:solidFill>
-                        <a:srgbClr val="CCE9F5"/>
+                        <a:srgbClr val="D1EEFA"/>
                       </a:solidFill>
                       <a:prstDash val="solid"/>
                     </a:lnR>
                     <a:lnT w="9525" cap="flat" cmpd="sng" algn="ctr">
                       <a:solidFill>
-                        <a:srgbClr val="CCE9F5"/>
+                        <a:srgbClr val="D1EEFA"/>
                       </a:solidFill>
                       <a:prstDash val="solid"/>
                     </a:lnT>
                     <a:lnB w="9525" cap="flat" cmpd="sng" algn="ctr">
                       <a:solidFill>
-                        <a:srgbClr val="CCE9F5"/>
+                        <a:srgbClr val="D1EEFA"/>
                       </a:solidFill>
                       <a:prstDash val="solid"/>
                     </a:lnB>
                     <a:solidFill>
-                      <a:srgbClr val="CCE9F5"/>
+                      <a:srgbClr val="D1EEFA"/>
                     </a:solidFill>
                   </a:tcPr>
                 </a:tc>
@@ -3863,30 +3863,30 @@
                   <a:tcPr anchor="ctr" marL="73152" marR="73152">
                     <a:lnL w="9525" cap="flat" cmpd="sng" algn="ctr">
                       <a:solidFill>
-                        <a:srgbClr val="CCE9F5"/>
+                        <a:srgbClr val="D1EEFA"/>
                       </a:solidFill>
                       <a:prstDash val="solid"/>
                     </a:lnL>
                     <a:lnR w="9525" cap="flat" cmpd="sng" algn="ctr">
                       <a:solidFill>
-                        <a:srgbClr val="CCE9F5"/>
+                        <a:srgbClr val="D1EEFA"/>
                       </a:solidFill>
                       <a:prstDash val="solid"/>
                     </a:lnR>
                     <a:lnT w="9525" cap="flat" cmpd="sng" algn="ctr">
                       <a:solidFill>
-                        <a:srgbClr val="CCE9F5"/>
+                        <a:srgbClr val="D1EEFA"/>
                       </a:solidFill>
                       <a:prstDash val="solid"/>
                     </a:lnT>
                     <a:lnB w="9525" cap="flat" cmpd="sng" algn="ctr">
                       <a:solidFill>
-                        <a:srgbClr val="CCE9F5"/>
+                        <a:srgbClr val="D1EEFA"/>
                       </a:solidFill>
                       <a:prstDash val="solid"/>
                     </a:lnB>
                     <a:solidFill>
-                      <a:srgbClr val="EEF7FB"/>
+                      <a:srgbClr val="EEF8FC"/>
                     </a:solidFill>
                   </a:tcPr>
                 </a:tc>
@@ -3901,7 +3901,7 @@
                       <a:r>
                         <a:rPr sz="1500" b="1">
                           <a:solidFill>
-                            <a:srgbClr val="11394A"/>
+                            <a:srgbClr val="11485F"/>
                           </a:solidFill>
                         </a:rPr>
                         <a:t>좋아하는 것</a:t>
@@ -3911,30 +3911,30 @@
                   <a:tcPr anchor="ctr" marL="73152" marR="73152">
                     <a:lnL w="9525" cap="flat" cmpd="sng" algn="ctr">
                       <a:solidFill>
-                        <a:srgbClr val="CCE9F5"/>
+                        <a:srgbClr val="D1EEFA"/>
                       </a:solidFill>
                       <a:prstDash val="solid"/>
                     </a:lnL>
                     <a:lnR w="9525" cap="flat" cmpd="sng" algn="ctr">
                       <a:solidFill>
-                        <a:srgbClr val="CCE9F5"/>
+                        <a:srgbClr val="D1EEFA"/>
                       </a:solidFill>
                       <a:prstDash val="solid"/>
                     </a:lnR>
                     <a:lnT w="9525" cap="flat" cmpd="sng" algn="ctr">
                       <a:solidFill>
-                        <a:srgbClr val="CCE9F5"/>
+                        <a:srgbClr val="D1EEFA"/>
                       </a:solidFill>
                       <a:prstDash val="solid"/>
                     </a:lnT>
                     <a:lnB w="9525" cap="flat" cmpd="sng" algn="ctr">
                       <a:solidFill>
-                        <a:srgbClr val="CCE9F5"/>
+                        <a:srgbClr val="D1EEFA"/>
                       </a:solidFill>
                       <a:prstDash val="solid"/>
                     </a:lnB>
                     <a:solidFill>
-                      <a:srgbClr val="CCE9F5"/>
+                      <a:srgbClr val="D1EEFA"/>
                     </a:solidFill>
                   </a:tcPr>
                 </a:tc>
@@ -3957,25 +3957,25 @@
                   <a:tcPr anchor="ctr" marL="73152" marR="73152">
                     <a:lnL w="9525" cap="flat" cmpd="sng" algn="ctr">
                       <a:solidFill>
-                        <a:srgbClr val="CCE9F5"/>
+                        <a:srgbClr val="D1EEFA"/>
                       </a:solidFill>
                       <a:prstDash val="solid"/>
                     </a:lnL>
                     <a:lnR w="9525" cap="flat" cmpd="sng" algn="ctr">
                       <a:solidFill>
-                        <a:srgbClr val="CCE9F5"/>
+                        <a:srgbClr val="D1EEFA"/>
                       </a:solidFill>
                       <a:prstDash val="solid"/>
                     </a:lnR>
                     <a:lnT w="9525" cap="flat" cmpd="sng" algn="ctr">
                       <a:solidFill>
-                        <a:srgbClr val="CCE9F5"/>
+                        <a:srgbClr val="D1EEFA"/>
                       </a:solidFill>
                       <a:prstDash val="solid"/>
                     </a:lnT>
                     <a:lnB w="9525" cap="flat" cmpd="sng" algn="ctr">
                       <a:solidFill>
-                        <a:srgbClr val="CCE9F5"/>
+                        <a:srgbClr val="D1EEFA"/>
                       </a:solidFill>
                       <a:prstDash val="solid"/>
                     </a:lnB>
@@ -3995,7 +3995,7 @@
                       <a:r>
                         <a:rPr sz="1500" b="1">
                           <a:solidFill>
-                            <a:srgbClr val="11394A"/>
+                            <a:srgbClr val="11485F"/>
                           </a:solidFill>
                         </a:rPr>
                         <a:t>별명</a:t>
@@ -4005,30 +4005,30 @@
                   <a:tcPr anchor="ctr" marL="73152" marR="73152">
                     <a:lnL w="9525" cap="flat" cmpd="sng" algn="ctr">
                       <a:solidFill>
-                        <a:srgbClr val="CCE9F5"/>
+                        <a:srgbClr val="D1EEFA"/>
                       </a:solidFill>
                       <a:prstDash val="solid"/>
                     </a:lnL>
                     <a:lnR w="9525" cap="flat" cmpd="sng" algn="ctr">
                       <a:solidFill>
-                        <a:srgbClr val="CCE9F5"/>
+                        <a:srgbClr val="D1EEFA"/>
                       </a:solidFill>
                       <a:prstDash val="solid"/>
                     </a:lnR>
                     <a:lnT w="9525" cap="flat" cmpd="sng" algn="ctr">
                       <a:solidFill>
-                        <a:srgbClr val="CCE9F5"/>
+                        <a:srgbClr val="D1EEFA"/>
                       </a:solidFill>
                       <a:prstDash val="solid"/>
                     </a:lnT>
                     <a:lnB w="9525" cap="flat" cmpd="sng" algn="ctr">
                       <a:solidFill>
-                        <a:srgbClr val="CCE9F5"/>
+                        <a:srgbClr val="D1EEFA"/>
                       </a:solidFill>
                       <a:prstDash val="solid"/>
                     </a:lnB>
                     <a:solidFill>
-                      <a:srgbClr val="CCE9F5"/>
+                      <a:srgbClr val="D1EEFA"/>
                     </a:solidFill>
                   </a:tcPr>
                 </a:tc>
@@ -4051,30 +4051,30 @@
                   <a:tcPr anchor="ctr" marL="73152" marR="73152">
                     <a:lnL w="9525" cap="flat" cmpd="sng" algn="ctr">
                       <a:solidFill>
-                        <a:srgbClr val="CCE9F5"/>
+                        <a:srgbClr val="D1EEFA"/>
                       </a:solidFill>
                       <a:prstDash val="solid"/>
                     </a:lnL>
                     <a:lnR w="9525" cap="flat" cmpd="sng" algn="ctr">
                       <a:solidFill>
-                        <a:srgbClr val="CCE9F5"/>
+                        <a:srgbClr val="D1EEFA"/>
                       </a:solidFill>
                       <a:prstDash val="solid"/>
                     </a:lnR>
                     <a:lnT w="9525" cap="flat" cmpd="sng" algn="ctr">
                       <a:solidFill>
-                        <a:srgbClr val="CCE9F5"/>
+                        <a:srgbClr val="D1EEFA"/>
                       </a:solidFill>
                       <a:prstDash val="solid"/>
                     </a:lnT>
                     <a:lnB w="9525" cap="flat" cmpd="sng" algn="ctr">
                       <a:solidFill>
-                        <a:srgbClr val="CCE9F5"/>
+                        <a:srgbClr val="D1EEFA"/>
                       </a:solidFill>
                       <a:prstDash val="solid"/>
                     </a:lnB>
                     <a:solidFill>
-                      <a:srgbClr val="EEF7FB"/>
+                      <a:srgbClr val="EEF8FC"/>
                     </a:solidFill>
                   </a:tcPr>
                 </a:tc>
@@ -4089,7 +4089,7 @@
                       <a:r>
                         <a:rPr sz="1500" b="1">
                           <a:solidFill>
-                            <a:srgbClr val="11394A"/>
+                            <a:srgbClr val="11485F"/>
                           </a:solidFill>
                         </a:rPr>
                         <a:t>부모의 마음</a:t>
@@ -4099,30 +4099,30 @@
                   <a:tcPr anchor="ctr" marL="73152" marR="73152">
                     <a:lnL w="9525" cap="flat" cmpd="sng" algn="ctr">
                       <a:solidFill>
-                        <a:srgbClr val="CCE9F5"/>
+                        <a:srgbClr val="D1EEFA"/>
                       </a:solidFill>
                       <a:prstDash val="solid"/>
                     </a:lnL>
                     <a:lnR w="9525" cap="flat" cmpd="sng" algn="ctr">
                       <a:solidFill>
-                        <a:srgbClr val="CCE9F5"/>
+                        <a:srgbClr val="D1EEFA"/>
                       </a:solidFill>
                       <a:prstDash val="solid"/>
                     </a:lnR>
                     <a:lnT w="9525" cap="flat" cmpd="sng" algn="ctr">
                       <a:solidFill>
-                        <a:srgbClr val="CCE9F5"/>
+                        <a:srgbClr val="D1EEFA"/>
                       </a:solidFill>
                       <a:prstDash val="solid"/>
                     </a:lnT>
                     <a:lnB w="9525" cap="flat" cmpd="sng" algn="ctr">
                       <a:solidFill>
-                        <a:srgbClr val="CCE9F5"/>
+                        <a:srgbClr val="D1EEFA"/>
                       </a:solidFill>
                       <a:prstDash val="solid"/>
                     </a:lnB>
                     <a:solidFill>
-                      <a:srgbClr val="CCE9F5"/>
+                      <a:srgbClr val="D1EEFA"/>
                     </a:solidFill>
                   </a:tcPr>
                 </a:tc>
@@ -4145,25 +4145,25 @@
                   <a:tcPr anchor="ctr" marL="73152" marR="73152">
                     <a:lnL w="9525" cap="flat" cmpd="sng" algn="ctr">
                       <a:solidFill>
-                        <a:srgbClr val="CCE9F5"/>
+                        <a:srgbClr val="D1EEFA"/>
                       </a:solidFill>
                       <a:prstDash val="solid"/>
                     </a:lnL>
                     <a:lnR w="9525" cap="flat" cmpd="sng" algn="ctr">
                       <a:solidFill>
-                        <a:srgbClr val="CCE9F5"/>
+                        <a:srgbClr val="D1EEFA"/>
                       </a:solidFill>
                       <a:prstDash val="solid"/>
                     </a:lnR>
                     <a:lnT w="9525" cap="flat" cmpd="sng" algn="ctr">
                       <a:solidFill>
-                        <a:srgbClr val="CCE9F5"/>
+                        <a:srgbClr val="D1EEFA"/>
                       </a:solidFill>
                       <a:prstDash val="solid"/>
                     </a:lnT>
                     <a:lnB w="9525" cap="flat" cmpd="sng" algn="ctr">
                       <a:solidFill>
-                        <a:srgbClr val="CCE9F5"/>
+                        <a:srgbClr val="D1EEFA"/>
                       </a:solidFill>
                       <a:prstDash val="solid"/>
                     </a:lnB>
@@ -4218,7 +4218,7 @@
             <a:avLst/>
           </a:prstGeom>
           <a:solidFill>
-            <a:srgbClr val="25799D"/>
+            <a:srgbClr val="2695C5"/>
           </a:solidFill>
           <a:ln>
             <a:noFill/>
@@ -4287,11 +4287,11 @@
             </a:avLst>
           </a:prstGeom>
           <a:solidFill>
-            <a:srgbClr val="CCE9F5"/>
+            <a:srgbClr val="D1EEFA"/>
           </a:solidFill>
           <a:ln w="19050">
             <a:solidFill>
-              <a:srgbClr val="25799D"/>
+              <a:srgbClr val="2695C5"/>
             </a:solidFill>
             <a:prstDash val="dash"/>
           </a:ln>
@@ -4310,7 +4310,7 @@
             <a:r>
               <a:rPr sz="1400" b="0" i="0">
                 <a:solidFill>
-                  <a:srgbClr val="11394A"/>
+                  <a:srgbClr val="11485F"/>
                 </a:solidFill>
               </a:rPr>
               <a:t>대표 사진 1</a:t>
@@ -4335,11 +4335,11 @@
             </a:avLst>
           </a:prstGeom>
           <a:solidFill>
-            <a:srgbClr val="CCE9F5"/>
+            <a:srgbClr val="D1EEFA"/>
           </a:solidFill>
           <a:ln w="19050">
             <a:solidFill>
-              <a:srgbClr val="25799D"/>
+              <a:srgbClr val="2695C5"/>
             </a:solidFill>
             <a:prstDash val="dash"/>
           </a:ln>
@@ -4358,7 +4358,7 @@
             <a:r>
               <a:rPr sz="1400" b="0" i="0">
                 <a:solidFill>
-                  <a:srgbClr val="11394A"/>
+                  <a:srgbClr val="11485F"/>
                 </a:solidFill>
               </a:rPr>
               <a:t>대표 사진 2</a:t>
@@ -4407,7 +4407,7 @@
             <a:avLst/>
           </a:prstGeom>
           <a:solidFill>
-            <a:srgbClr val="25799D"/>
+            <a:srgbClr val="2695C5"/>
           </a:solidFill>
           <a:ln>
             <a:noFill/>
@@ -4476,11 +4476,11 @@
             </a:avLst>
           </a:prstGeom>
           <a:solidFill>
-            <a:srgbClr val="CCE9F5"/>
+            <a:srgbClr val="D1EEFA"/>
           </a:solidFill>
           <a:ln w="19050">
             <a:solidFill>
-              <a:srgbClr val="25799D"/>
+              <a:srgbClr val="2695C5"/>
             </a:solidFill>
             <a:prstDash val="dash"/>
           </a:ln>
@@ -4499,7 +4499,7 @@
             <a:r>
               <a:rPr sz="1200" b="0" i="0">
                 <a:solidFill>
-                  <a:srgbClr val="11394A"/>
+                  <a:srgbClr val="11485F"/>
                 </a:solidFill>
               </a:rPr>
               <a:t>사진 1</a:t>
@@ -4524,11 +4524,11 @@
             </a:avLst>
           </a:prstGeom>
           <a:solidFill>
-            <a:srgbClr val="CCE9F5"/>
+            <a:srgbClr val="D1EEFA"/>
           </a:solidFill>
           <a:ln w="19050">
             <a:solidFill>
-              <a:srgbClr val="25799D"/>
+              <a:srgbClr val="2695C5"/>
             </a:solidFill>
             <a:prstDash val="dash"/>
           </a:ln>
@@ -4547,7 +4547,7 @@
             <a:r>
               <a:rPr sz="1200" b="0" i="0">
                 <a:solidFill>
-                  <a:srgbClr val="11394A"/>
+                  <a:srgbClr val="11485F"/>
                 </a:solidFill>
               </a:rPr>
               <a:t>사진 2</a:t>
@@ -4572,11 +4572,11 @@
             </a:avLst>
           </a:prstGeom>
           <a:solidFill>
-            <a:srgbClr val="CCE9F5"/>
+            <a:srgbClr val="D1EEFA"/>
           </a:solidFill>
           <a:ln w="19050">
             <a:solidFill>
-              <a:srgbClr val="25799D"/>
+              <a:srgbClr val="2695C5"/>
             </a:solidFill>
             <a:prstDash val="dash"/>
           </a:ln>
@@ -4595,7 +4595,7 @@
             <a:r>
               <a:rPr sz="1200" b="0" i="0">
                 <a:solidFill>
-                  <a:srgbClr val="11394A"/>
+                  <a:srgbClr val="11485F"/>
                 </a:solidFill>
               </a:rPr>
               <a:t>사진 3</a:t>
@@ -4620,11 +4620,11 @@
             </a:avLst>
           </a:prstGeom>
           <a:solidFill>
-            <a:srgbClr val="CCE9F5"/>
+            <a:srgbClr val="D1EEFA"/>
           </a:solidFill>
           <a:ln w="19050">
             <a:solidFill>
-              <a:srgbClr val="25799D"/>
+              <a:srgbClr val="2695C5"/>
             </a:solidFill>
             <a:prstDash val="dash"/>
           </a:ln>
@@ -4643,7 +4643,7 @@
             <a:r>
               <a:rPr sz="1200" b="0" i="0">
                 <a:solidFill>
-                  <a:srgbClr val="11394A"/>
+                  <a:srgbClr val="11485F"/>
                 </a:solidFill>
               </a:rPr>
               <a:t>사진 4</a:t>
@@ -4668,11 +4668,11 @@
             </a:avLst>
           </a:prstGeom>
           <a:solidFill>
-            <a:srgbClr val="CCE9F5"/>
+            <a:srgbClr val="D1EEFA"/>
           </a:solidFill>
           <a:ln w="19050">
             <a:solidFill>
-              <a:srgbClr val="25799D"/>
+              <a:srgbClr val="2695C5"/>
             </a:solidFill>
             <a:prstDash val="dash"/>
           </a:ln>
@@ -4691,7 +4691,7 @@
             <a:r>
               <a:rPr sz="1200" b="0" i="0">
                 <a:solidFill>
-                  <a:srgbClr val="11394A"/>
+                  <a:srgbClr val="11485F"/>
                 </a:solidFill>
               </a:rPr>
               <a:t>사진 5</a:t>
@@ -4716,11 +4716,11 @@
             </a:avLst>
           </a:prstGeom>
           <a:solidFill>
-            <a:srgbClr val="CCE9F5"/>
+            <a:srgbClr val="D1EEFA"/>
           </a:solidFill>
           <a:ln w="19050">
             <a:solidFill>
-              <a:srgbClr val="25799D"/>
+              <a:srgbClr val="2695C5"/>
             </a:solidFill>
             <a:prstDash val="dash"/>
           </a:ln>
@@ -4739,7 +4739,7 @@
             <a:r>
               <a:rPr sz="1200" b="0" i="0">
                 <a:solidFill>
-                  <a:srgbClr val="11394A"/>
+                  <a:srgbClr val="11485F"/>
                 </a:solidFill>
               </a:rPr>
               <a:t>사진 6</a:t>
@@ -4788,7 +4788,7 @@
             <a:avLst/>
           </a:prstGeom>
           <a:solidFill>
-            <a:srgbClr val="25799D"/>
+            <a:srgbClr val="2695C5"/>
           </a:solidFill>
           <a:ln>
             <a:noFill/>
@@ -4857,11 +4857,11 @@
             </a:avLst>
           </a:prstGeom>
           <a:solidFill>
-            <a:srgbClr val="CCE9F5"/>
+            <a:srgbClr val="D1EEFA"/>
           </a:solidFill>
           <a:ln w="19050">
             <a:solidFill>
-              <a:srgbClr val="25799D"/>
+              <a:srgbClr val="2695C5"/>
             </a:solidFill>
             <a:prstDash val="dash"/>
           </a:ln>
@@ -4880,7 +4880,7 @@
             <a:r>
               <a:rPr sz="1200" b="0" i="0">
                 <a:solidFill>
-                  <a:srgbClr val="11394A"/>
+                  <a:srgbClr val="11485F"/>
                 </a:solidFill>
               </a:rPr>
               <a:t>사진 1</a:t>
@@ -4905,11 +4905,11 @@
             </a:avLst>
           </a:prstGeom>
           <a:solidFill>
-            <a:srgbClr val="CCE9F5"/>
+            <a:srgbClr val="D1EEFA"/>
           </a:solidFill>
           <a:ln w="19050">
             <a:solidFill>
-              <a:srgbClr val="25799D"/>
+              <a:srgbClr val="2695C5"/>
             </a:solidFill>
             <a:prstDash val="dash"/>
           </a:ln>
@@ -4928,7 +4928,7 @@
             <a:r>
               <a:rPr sz="1200" b="0" i="0">
                 <a:solidFill>
-                  <a:srgbClr val="11394A"/>
+                  <a:srgbClr val="11485F"/>
                 </a:solidFill>
               </a:rPr>
               <a:t>사진 2</a:t>
@@ -4953,11 +4953,11 @@
             </a:avLst>
           </a:prstGeom>
           <a:solidFill>
-            <a:srgbClr val="CCE9F5"/>
+            <a:srgbClr val="D1EEFA"/>
           </a:solidFill>
           <a:ln w="19050">
             <a:solidFill>
-              <a:srgbClr val="25799D"/>
+              <a:srgbClr val="2695C5"/>
             </a:solidFill>
             <a:prstDash val="dash"/>
           </a:ln>
@@ -4976,7 +4976,7 @@
             <a:r>
               <a:rPr sz="1200" b="0" i="0">
                 <a:solidFill>
-                  <a:srgbClr val="11394A"/>
+                  <a:srgbClr val="11485F"/>
                 </a:solidFill>
               </a:rPr>
               <a:t>사진 3</a:t>
@@ -5001,11 +5001,11 @@
             </a:avLst>
           </a:prstGeom>
           <a:solidFill>
-            <a:srgbClr val="CCE9F5"/>
+            <a:srgbClr val="D1EEFA"/>
           </a:solidFill>
           <a:ln w="19050">
             <a:solidFill>
-              <a:srgbClr val="25799D"/>
+              <a:srgbClr val="2695C5"/>
             </a:solidFill>
             <a:prstDash val="dash"/>
           </a:ln>
@@ -5024,7 +5024,7 @@
             <a:r>
               <a:rPr sz="1200" b="0" i="0">
                 <a:solidFill>
-                  <a:srgbClr val="11394A"/>
+                  <a:srgbClr val="11485F"/>
                 </a:solidFill>
               </a:rPr>
               <a:t>사진 4</a:t>
@@ -5049,11 +5049,11 @@
             </a:avLst>
           </a:prstGeom>
           <a:solidFill>
-            <a:srgbClr val="CCE9F5"/>
+            <a:srgbClr val="D1EEFA"/>
           </a:solidFill>
           <a:ln w="19050">
             <a:solidFill>
-              <a:srgbClr val="25799D"/>
+              <a:srgbClr val="2695C5"/>
             </a:solidFill>
             <a:prstDash val="dash"/>
           </a:ln>
@@ -5072,7 +5072,7 @@
             <a:r>
               <a:rPr sz="1200" b="0" i="0">
                 <a:solidFill>
-                  <a:srgbClr val="11394A"/>
+                  <a:srgbClr val="11485F"/>
                 </a:solidFill>
               </a:rPr>
               <a:t>사진 5</a:t>
@@ -5097,11 +5097,11 @@
             </a:avLst>
           </a:prstGeom>
           <a:solidFill>
-            <a:srgbClr val="CCE9F5"/>
+            <a:srgbClr val="D1EEFA"/>
           </a:solidFill>
           <a:ln w="19050">
             <a:solidFill>
-              <a:srgbClr val="25799D"/>
+              <a:srgbClr val="2695C5"/>
             </a:solidFill>
             <a:prstDash val="dash"/>
           </a:ln>
@@ -5120,7 +5120,7 @@
             <a:r>
               <a:rPr sz="1200" b="0" i="0">
                 <a:solidFill>
-                  <a:srgbClr val="11394A"/>
+                  <a:srgbClr val="11485F"/>
                 </a:solidFill>
               </a:rPr>
               <a:t>사진 6</a:t>
@@ -5145,11 +5145,11 @@
             </a:avLst>
           </a:prstGeom>
           <a:solidFill>
-            <a:srgbClr val="CCE9F5"/>
+            <a:srgbClr val="D1EEFA"/>
           </a:solidFill>
           <a:ln w="19050">
             <a:solidFill>
-              <a:srgbClr val="25799D"/>
+              <a:srgbClr val="2695C5"/>
             </a:solidFill>
             <a:prstDash val="dash"/>
           </a:ln>
@@ -5168,7 +5168,7 @@
             <a:r>
               <a:rPr sz="1200" b="0" i="0">
                 <a:solidFill>
-                  <a:srgbClr val="11394A"/>
+                  <a:srgbClr val="11485F"/>
                 </a:solidFill>
               </a:rPr>
               <a:t>사진 7</a:t>
@@ -5193,11 +5193,11 @@
             </a:avLst>
           </a:prstGeom>
           <a:solidFill>
-            <a:srgbClr val="CCE9F5"/>
+            <a:srgbClr val="D1EEFA"/>
           </a:solidFill>
           <a:ln w="19050">
             <a:solidFill>
-              <a:srgbClr val="25799D"/>
+              <a:srgbClr val="2695C5"/>
             </a:solidFill>
             <a:prstDash val="dash"/>
           </a:ln>
@@ -5216,7 +5216,7 @@
             <a:r>
               <a:rPr sz="1200" b="0" i="0">
                 <a:solidFill>
-                  <a:srgbClr val="11394A"/>
+                  <a:srgbClr val="11485F"/>
                 </a:solidFill>
               </a:rPr>
               <a:t>사진 8</a:t>
@@ -5296,7 +5296,7 @@
             <a:r>
               <a:rPr sz="3400" b="1" i="0">
                 <a:solidFill>
-                  <a:srgbClr val="11394A"/>
+                  <a:srgbClr val="11485F"/>
                 </a:solidFill>
               </a:rPr>
               <a:t>와 주셔서 고맙습니다</a:t>
@@ -5334,7 +5334,7 @@
             <a:r>
               <a:rPr sz="1700" b="0" i="1">
                 <a:solidFill>
-                  <a:srgbClr val="11394A"/>
+                  <a:srgbClr val="11485F"/>
                 </a:solidFill>
               </a:rPr>
               <a:t>아이가 한 살이 되었습니다</a:t>
@@ -5399,34 +5399,34 @@
         <a:sysClr val="window" lastClr="FFFFFF"/>
       </a:lt1>
       <a:dk2>
-        <a:srgbClr val="11394A"/>
+        <a:srgbClr val="11485F"/>
       </a:dk2>
       <a:lt2>
-        <a:srgbClr val="EEF7FB"/>
+        <a:srgbClr val="EEF8FC"/>
       </a:lt2>
       <a:accent1>
-        <a:srgbClr val="25799D"/>
+        <a:srgbClr val="2695C5"/>
       </a:accent1>
       <a:accent2>
-        <a:srgbClr val="913B4C"/>
+        <a:srgbClr val="209DB6"/>
       </a:accent2>
       <a:accent3>
-        <a:srgbClr val="11394A"/>
+        <a:srgbClr val="11485F"/>
       </a:accent3>
       <a:accent4>
-        <a:srgbClr val="CCE9F5"/>
+        <a:srgbClr val="D1EEFA"/>
       </a:accent4>
       <a:accent5>
-        <a:srgbClr val="5B5A74"/>
+        <a:srgbClr val="2399BE"/>
       </a:accent5>
       <a:accent6>
-        <a:srgbClr val="708892"/>
+        <a:srgbClr val="70919F"/>
       </a:accent6>
       <a:hlink>
-        <a:srgbClr val="25799D"/>
+        <a:srgbClr val="2695C5"/>
       </a:hlink>
       <a:folHlink>
-        <a:srgbClr val="11394A"/>
+        <a:srgbClr val="11485F"/>
       </a:folHlink>
     </a:clrScheme>
     <a:fontScheme name="Office">

--- a/public/fun/pack/pptx/birthday/돌잔치_18_사진중심_바닷가등대.pptx
+++ b/public/fun/pack/pptx/birthday/돌잔치_18_사진중심_바닷가등대.pptx
@@ -3286,6 +3286,14 @@
 <file path=ppt/slides/slide1.xml><?xml version="1.0" encoding="utf-8"?>
 <p:sld xmlns:a="http://schemas.openxmlformats.org/drawingml/2006/main" xmlns:p="http://schemas.openxmlformats.org/presentationml/2006/main" xmlns:r="http://schemas.openxmlformats.org/officeDocument/2006/relationships">
   <p:cSld>
+    <p:bg>
+      <p:bgPr>
+        <a:solidFill>
+          <a:srgbClr val="EAF7FD"/>
+        </a:solidFill>
+        <a:effectLst/>
+      </p:bgPr>
+    </p:bg>
     <p:spTree>
       <p:nvGrpSpPr>
         <p:cNvPr id="1" name=""/>
@@ -3293,30 +3301,119 @@
         <p:nvPr/>
       </p:nvGrpSpPr>
       <p:grpSpPr/>
-      <p:pic>
-        <p:nvPicPr>
-          <p:cNvPr id="3" name="표지 그림" descr="birthday-18.jpg"/>
-          <p:cNvPicPr>
-            <a:picLocks noChangeAspect="1"/>
-          </p:cNvPicPr>
+      <p:sp>
+        <p:nvSpPr>
+          <p:cNvPr id="3" name="사진 자리"/>
+          <p:cNvSpPr/>
           <p:nvPr/>
-        </p:nvPicPr>
-        <p:blipFill>
-          <a:blip r:embed="rId2"/>
-          <a:stretch>
-            <a:fillRect/>
-          </a:stretch>
-        </p:blipFill>
-        <p:spPr>
-          <a:xfrm>
-            <a:off x="0" y="0"/>
-            <a:ext cx="12191695" cy="6858000"/>
+        </p:nvSpPr>
+        <p:spPr>
+          <a:xfrm>
+            <a:off x="1463003" y="685800"/>
+            <a:ext cx="3169840" cy="5486400"/>
+          </a:xfrm>
+          <a:prstGeom prst="round2SameRect">
+            <a:avLst>
+              <a:gd name="adj1" fmla="val 50000"/>
+              <a:gd name="adj2" fmla="val 0"/>
+            </a:avLst>
+          </a:prstGeom>
+          <a:solidFill>
+            <a:srgbClr val="A5DCF3"/>
+          </a:solidFill>
+          <a:ln>
+            <a:noFill/>
+          </a:ln>
+        </p:spPr>
+        <p:txBody>
+          <a:bodyPr rtlCol="0" anchor="ctr" wrap="square" lIns="54864" rIns="54864" tIns="27432" bIns="27432">
+            <a:noAutofit/>
+          </a:bodyPr>
+          <a:lstStyle/>
+          <a:p>
+            <a:pPr algn="ctr">
+              <a:lnSpc>
+                <a:spcPct val="100000"/>
+              </a:lnSpc>
+            </a:pPr>
+            <a:r>
+              <a:rPr sz="1400" b="0" i="0">
+                <a:solidFill>
+                  <a:srgbClr val="273F49"/>
+                </a:solidFill>
+              </a:rPr>
+              <a:t>사진을 넣어 주세요</a:t>
+            </a:r>
+          </a:p>
+        </p:txBody>
+      </p:sp>
+      <p:sp>
+        <p:nvSpPr>
+          <p:cNvPr id="4" name="장식"/>
+          <p:cNvSpPr/>
+          <p:nvPr/>
+        </p:nvSpPr>
+        <p:spPr>
+          <a:xfrm>
+            <a:off x="4358505" y="4251960"/>
+            <a:ext cx="1005840" cy="1005840"/>
+          </a:xfrm>
+          <a:prstGeom prst="ellipse">
+            <a:avLst/>
+          </a:prstGeom>
+          <a:solidFill>
+            <a:srgbClr val="A5DCF3"/>
+          </a:solidFill>
+          <a:ln>
+            <a:noFill/>
+          </a:ln>
+        </p:spPr>
+        <p:txBody>
+          <a:bodyPr rtlCol="0" anchor="ctr"/>
+          <a:lstStyle/>
+          <a:p>
+            <a:pPr algn="ctr"/>
+          </a:p>
+        </p:txBody>
+      </p:sp>
+      <p:sp>
+        <p:nvSpPr>
+          <p:cNvPr id="5" name="라벨"/>
+          <p:cNvSpPr txBox="1"/>
+          <p:nvPr/>
+        </p:nvSpPr>
+        <p:spPr>
+          <a:xfrm>
+            <a:off x="6827349" y="2148840"/>
+            <a:ext cx="4632844" cy="274320"/>
           </a:xfrm>
           <a:prstGeom prst="rect">
             <a:avLst/>
           </a:prstGeom>
-        </p:spPr>
-      </p:pic>
+          <a:noFill/>
+        </p:spPr>
+        <p:txBody>
+          <a:bodyPr wrap="square" lIns="54864" rIns="54864" tIns="27432" bIns="27432" anchor="t">
+            <a:noAutofit/>
+          </a:bodyPr>
+          <a:lstStyle/>
+          <a:p>
+            <a:pPr algn="l">
+              <a:lnSpc>
+                <a:spcPct val="115000"/>
+              </a:lnSpc>
+            </a:pPr>
+            <a:r>
+              <a:rPr sz="1000" b="1" i="0" spc="250">
+                <a:solidFill>
+                  <a:srgbClr val="26231F"/>
+                </a:solidFill>
+              </a:rPr>
+              <a:t>FIRST BIRTHDAY</a:t>
+            </a:r>
+          </a:p>
+        </p:txBody>
+      </p:sp>
       <p:sp>
         <p:nvSpPr>
           <p:cNvPr id="2" name="Title 1"/>
@@ -3329,8 +3426,8 @@
         </p:nvSpPr>
         <p:spPr>
           <a:xfrm>
-            <a:off x="853418" y="2057400"/>
-            <a:ext cx="6095847" cy="1554480"/>
+            <a:off x="6827349" y="2606040"/>
+            <a:ext cx="4632844" cy="1188720"/>
           </a:xfrm>
         </p:spPr>
         <p:txBody>
@@ -3347,7 +3444,7 @@
             <a:r>
               <a:rPr sz="4000" b="1" i="0">
                 <a:solidFill>
-                  <a:srgbClr val="11485F"/>
+                  <a:srgbClr val="26231F"/>
                 </a:solidFill>
               </a:rPr>
               <a:t>첫 번째 생일</a:t>
@@ -3357,14 +3454,14 @@
       </p:sp>
       <p:sp>
         <p:nvSpPr>
-          <p:cNvPr id="4" name="한 줄 문구"/>
+          <p:cNvPr id="6" name="한 줄 문구"/>
           <p:cNvSpPr txBox="1"/>
           <p:nvPr/>
         </p:nvSpPr>
         <p:spPr>
           <a:xfrm>
-            <a:off x="853418" y="3749039"/>
-            <a:ext cx="6095847" cy="822960"/>
+            <a:off x="6827349" y="3886200"/>
+            <a:ext cx="4632844" cy="822960"/>
           </a:xfrm>
           <a:prstGeom prst="rect">
             <a:avLst/>
@@ -3383,26 +3480,26 @@
               </a:lnSpc>
             </a:pPr>
             <a:r>
-              <a:rPr sz="1700" b="0" i="1">
+              <a:rPr sz="1700" b="0" i="0">
                 <a:solidFill>
-                  <a:srgbClr val="11485F"/>
+                  <a:srgbClr val="26231F"/>
                 </a:solidFill>
               </a:rPr>
-              <a:t>백일 사진과 지금 사진을 나란히 놓았습니다</a:t>
-            </a:r>
-          </a:p>
-        </p:txBody>
-      </p:sp>
-      <p:sp>
-        <p:nvSpPr>
-          <p:cNvPr id="5" name="안내 문구"/>
+              <a:t>처음 사진과 지금 사진을 나란히 놓았습니다</a:t>
+            </a:r>
+          </a:p>
+        </p:txBody>
+      </p:sp>
+      <p:sp>
+        <p:nvSpPr>
+          <p:cNvPr id="7" name="안내 문구"/>
           <p:cNvSpPr txBox="1"/>
           <p:nvPr/>
         </p:nvSpPr>
         <p:spPr>
           <a:xfrm>
-            <a:off x="853418" y="4617720"/>
-            <a:ext cx="6095847" cy="914400"/>
+            <a:off x="6827349" y="4754880"/>
+            <a:ext cx="4632844" cy="914400"/>
           </a:xfrm>
           <a:prstGeom prst="rect">
             <a:avLst/>
@@ -3423,10 +3520,10 @@
             <a:r>
               <a:rPr sz="1400" b="0" i="0">
                 <a:solidFill>
-                  <a:srgbClr val="666666"/>
+                  <a:srgbClr val="26231F"/>
                 </a:solidFill>
               </a:rPr>
-              <a:t>아기 이름 · 2027. 00. 00</a:t>
+              <a:t>아기 이름 · 날짜 입력</a:t>
             </a:r>
           </a:p>
           <a:p>
@@ -3438,7 +3535,7 @@
             <a:r>
               <a:rPr sz="1400" b="0" i="0">
                 <a:solidFill>
-                  <a:srgbClr val="666666"/>
+                  <a:srgbClr val="26231F"/>
                 </a:solidFill>
               </a:rPr>
               <a:t>장소를 입력하세요</a:t>
@@ -3480,14 +3577,14 @@
         </p:nvSpPr>
         <p:spPr>
           <a:xfrm>
-            <a:off x="0" y="384048"/>
-            <a:ext cx="9509522" cy="896112"/>
-          </a:xfrm>
-          <a:prstGeom prst="homePlate">
+            <a:off x="640080" y="566928"/>
+            <a:ext cx="10911535" cy="10972"/>
+          </a:xfrm>
+          <a:prstGeom prst="rect">
             <a:avLst/>
           </a:prstGeom>
           <a:solidFill>
-            <a:srgbClr val="2695C5"/>
+            <a:srgbClr val="26231F"/>
           </a:solidFill>
           <a:ln>
             <a:noFill/>
@@ -3503,6 +3600,73 @@
       </p:sp>
       <p:sp>
         <p:nvSpPr>
+          <p:cNvPr id="4" name="상단 라벨"/>
+          <p:cNvSpPr txBox="1"/>
+          <p:nvPr/>
+        </p:nvSpPr>
+        <p:spPr>
+          <a:xfrm>
+            <a:off x="640080" y="237744"/>
+            <a:ext cx="5486400" cy="274320"/>
+          </a:xfrm>
+          <a:prstGeom prst="rect">
+            <a:avLst/>
+          </a:prstGeom>
+          <a:noFill/>
+        </p:spPr>
+        <p:txBody>
+          <a:bodyPr wrap="square" lIns="54864" rIns="54864" tIns="27432" bIns="27432" anchor="ctr">
+            <a:noAutofit/>
+          </a:bodyPr>
+          <a:lstStyle/>
+          <a:p>
+            <a:pPr algn="l">
+              <a:lnSpc>
+                <a:spcPct val="115000"/>
+              </a:lnSpc>
+            </a:pPr>
+            <a:r>
+              <a:rPr sz="900" b="1" i="0" spc="250">
+                <a:solidFill>
+                  <a:srgbClr val="26231F"/>
+                </a:solidFill>
+              </a:rPr>
+              <a:t>FIRST BIRTHDAY</a:t>
+            </a:r>
+          </a:p>
+        </p:txBody>
+      </p:sp>
+      <p:sp>
+        <p:nvSpPr>
+          <p:cNvPr id="5" name="포인트"/>
+          <p:cNvSpPr/>
+          <p:nvPr/>
+        </p:nvSpPr>
+        <p:spPr>
+          <a:xfrm>
+            <a:off x="11204143" y="246888"/>
+            <a:ext cx="237744" cy="237744"/>
+          </a:xfrm>
+          <a:prstGeom prst="mathPlus">
+            <a:avLst/>
+          </a:prstGeom>
+          <a:solidFill>
+            <a:srgbClr val="7BC9EA"/>
+          </a:solidFill>
+          <a:ln>
+            <a:noFill/>
+          </a:ln>
+        </p:spPr>
+        <p:txBody>
+          <a:bodyPr rtlCol="0" anchor="ctr"/>
+          <a:lstStyle/>
+          <a:p>
+            <a:pPr algn="ctr"/>
+          </a:p>
+        </p:txBody>
+      </p:sp>
+      <p:sp>
+        <p:nvSpPr>
           <p:cNvPr id="2" name="Title 1"/>
           <p:cNvSpPr>
             <a:spLocks noGrp="1"/>
@@ -3513,8 +3677,8 @@
         </p:nvSpPr>
         <p:spPr>
           <a:xfrm>
-            <a:off x="640080" y="411480"/>
-            <a:ext cx="8412242" cy="822960"/>
+            <a:off x="640080" y="731520"/>
+            <a:ext cx="10911535" cy="822960"/>
           </a:xfrm>
         </p:spPr>
         <p:txBody>
@@ -3531,7 +3695,7 @@
             <a:r>
               <a:rPr sz="3000" b="1" i="0">
                 <a:solidFill>
-                  <a:srgbClr val="FFFFFF"/>
+                  <a:srgbClr val="26231F"/>
                 </a:solidFill>
               </a:rPr>
               <a:t>우리 아기를 소개합니다</a:t>
@@ -3541,14 +3705,14 @@
       </p:sp>
       <p:sp>
         <p:nvSpPr>
-          <p:cNvPr id="4" name="사진 자리"/>
+          <p:cNvPr id="6" name="사진 자리"/>
           <p:cNvSpPr/>
           <p:nvPr/>
         </p:nvSpPr>
         <p:spPr>
           <a:xfrm>
-            <a:off x="640080" y="1645920"/>
-            <a:ext cx="3840480" cy="4572000"/>
+            <a:off x="640080" y="1783080"/>
+            <a:ext cx="3840480" cy="4389120"/>
           </a:xfrm>
           <a:prstGeom prst="roundRect">
             <a:avLst>
@@ -3559,9 +3723,7 @@
             <a:srgbClr val="D1EEFA"/>
           </a:solidFill>
           <a:ln w="19050">
-            <a:solidFill>
-              <a:srgbClr val="2695C5"/>
-            </a:solidFill>
+            <a:noFill/>
             <a:prstDash val="dash"/>
           </a:ln>
         </p:spPr>
@@ -3579,7 +3741,7 @@
             <a:r>
               <a:rPr sz="1400" b="0" i="0">
                 <a:solidFill>
-                  <a:srgbClr val="11485F"/>
+                  <a:srgbClr val="8E8780"/>
                 </a:solidFill>
               </a:rPr>
               <a:t>아기 사진을 넣어 주세요</a:t>
@@ -3589,14 +3751,14 @@
       </p:sp>
       <p:graphicFrame>
         <p:nvGraphicFramePr>
-          <p:cNvPr id="5" name="표"/>
+          <p:cNvPr id="7" name="표"/>
           <p:cNvGraphicFramePr>
             <a:graphicFrameLocks noGrp="1"/>
           </p:cNvGraphicFramePr>
           <p:nvPr/>
         </p:nvGraphicFramePr>
         <p:xfrm>
-          <a:off x="4846320" y="1645920"/>
+          <a:off x="4846320" y="1783080"/>
           <a:ext cx="6705295" cy="3950208"/>
         </p:xfrm>
         <a:graphic>
@@ -3619,7 +3781,7 @@
                       <a:r>
                         <a:rPr sz="1500" b="1">
                           <a:solidFill>
-                            <a:srgbClr val="11485F"/>
+                            <a:srgbClr val="273F49"/>
                           </a:solidFill>
                         </a:rPr>
                         <a:t>이름</a:t>
@@ -3665,7 +3827,7 @@
                       <a:r>
                         <a:rPr sz="1500" b="0">
                           <a:solidFill>
-                            <a:srgbClr val="2B2B2B"/>
+                            <a:srgbClr val="26231F"/>
                           </a:solidFill>
                         </a:rPr>
                         <a:t>입력하세요</a:t>
@@ -3698,7 +3860,7 @@
                       <a:prstDash val="solid"/>
                     </a:lnB>
                     <a:solidFill>
-                      <a:srgbClr val="EEF8FC"/>
+                      <a:srgbClr val="EAF7FD"/>
                     </a:solidFill>
                   </a:tcPr>
                 </a:tc>
@@ -3713,7 +3875,7 @@
                       <a:r>
                         <a:rPr sz="1500" b="1">
                           <a:solidFill>
-                            <a:srgbClr val="11485F"/>
+                            <a:srgbClr val="273F49"/>
                           </a:solidFill>
                         </a:rPr>
                         <a:t>생일</a:t>
@@ -3759,7 +3921,7 @@
                       <a:r>
                         <a:rPr sz="1500" b="0">
                           <a:solidFill>
-                            <a:srgbClr val="2B2B2B"/>
+                            <a:srgbClr val="26231F"/>
                           </a:solidFill>
                         </a:rPr>
                         <a:t>입력하세요</a:t>
@@ -3807,7 +3969,7 @@
                       <a:r>
                         <a:rPr sz="1500" b="1">
                           <a:solidFill>
-                            <a:srgbClr val="11485F"/>
+                            <a:srgbClr val="273F49"/>
                           </a:solidFill>
                         </a:rPr>
                         <a:t>키 · 몸무게</a:t>
@@ -3853,7 +4015,7 @@
                       <a:r>
                         <a:rPr sz="1500" b="0">
                           <a:solidFill>
-                            <a:srgbClr val="2B2B2B"/>
+                            <a:srgbClr val="26231F"/>
                           </a:solidFill>
                         </a:rPr>
                         <a:t>입력하세요</a:t>
@@ -3886,7 +4048,7 @@
                       <a:prstDash val="solid"/>
                     </a:lnB>
                     <a:solidFill>
-                      <a:srgbClr val="EEF8FC"/>
+                      <a:srgbClr val="EAF7FD"/>
                     </a:solidFill>
                   </a:tcPr>
                 </a:tc>
@@ -3901,7 +4063,7 @@
                       <a:r>
                         <a:rPr sz="1500" b="1">
                           <a:solidFill>
-                            <a:srgbClr val="11485F"/>
+                            <a:srgbClr val="273F49"/>
                           </a:solidFill>
                         </a:rPr>
                         <a:t>좋아하는 것</a:t>
@@ -3947,7 +4109,7 @@
                       <a:r>
                         <a:rPr sz="1500" b="0">
                           <a:solidFill>
-                            <a:srgbClr val="2B2B2B"/>
+                            <a:srgbClr val="26231F"/>
                           </a:solidFill>
                         </a:rPr>
                         <a:t>입력하세요</a:t>
@@ -3995,7 +4157,7 @@
                       <a:r>
                         <a:rPr sz="1500" b="1">
                           <a:solidFill>
-                            <a:srgbClr val="11485F"/>
+                            <a:srgbClr val="273F49"/>
                           </a:solidFill>
                         </a:rPr>
                         <a:t>별명</a:t>
@@ -4041,7 +4203,7 @@
                       <a:r>
                         <a:rPr sz="1500" b="0">
                           <a:solidFill>
-                            <a:srgbClr val="2B2B2B"/>
+                            <a:srgbClr val="26231F"/>
                           </a:solidFill>
                         </a:rPr>
                         <a:t>입력하세요</a:t>
@@ -4074,7 +4236,7 @@
                       <a:prstDash val="solid"/>
                     </a:lnB>
                     <a:solidFill>
-                      <a:srgbClr val="EEF8FC"/>
+                      <a:srgbClr val="EAF7FD"/>
                     </a:solidFill>
                   </a:tcPr>
                 </a:tc>
@@ -4089,7 +4251,7 @@
                       <a:r>
                         <a:rPr sz="1500" b="1">
                           <a:solidFill>
-                            <a:srgbClr val="11485F"/>
+                            <a:srgbClr val="273F49"/>
                           </a:solidFill>
                         </a:rPr>
                         <a:t>부모의 마음</a:t>
@@ -4135,7 +4297,7 @@
                       <a:r>
                         <a:rPr sz="1500" b="0">
                           <a:solidFill>
-                            <a:srgbClr val="2B2B2B"/>
+                            <a:srgbClr val="26231F"/>
                           </a:solidFill>
                         </a:rPr>
                         <a:t>입력하세요</a:t>
@@ -4211,14 +4373,14 @@
         </p:nvSpPr>
         <p:spPr>
           <a:xfrm>
-            <a:off x="0" y="384048"/>
-            <a:ext cx="9509522" cy="896112"/>
-          </a:xfrm>
-          <a:prstGeom prst="homePlate">
+            <a:off x="640080" y="566928"/>
+            <a:ext cx="10911535" cy="10972"/>
+          </a:xfrm>
+          <a:prstGeom prst="rect">
             <a:avLst/>
           </a:prstGeom>
           <a:solidFill>
-            <a:srgbClr val="2695C5"/>
+            <a:srgbClr val="26231F"/>
           </a:solidFill>
           <a:ln>
             <a:noFill/>
@@ -4234,6 +4396,73 @@
       </p:sp>
       <p:sp>
         <p:nvSpPr>
+          <p:cNvPr id="4" name="상단 라벨"/>
+          <p:cNvSpPr txBox="1"/>
+          <p:nvPr/>
+        </p:nvSpPr>
+        <p:spPr>
+          <a:xfrm>
+            <a:off x="640080" y="237744"/>
+            <a:ext cx="5486400" cy="274320"/>
+          </a:xfrm>
+          <a:prstGeom prst="rect">
+            <a:avLst/>
+          </a:prstGeom>
+          <a:noFill/>
+        </p:spPr>
+        <p:txBody>
+          <a:bodyPr wrap="square" lIns="54864" rIns="54864" tIns="27432" bIns="27432" anchor="ctr">
+            <a:noAutofit/>
+          </a:bodyPr>
+          <a:lstStyle/>
+          <a:p>
+            <a:pPr algn="l">
+              <a:lnSpc>
+                <a:spcPct val="115000"/>
+              </a:lnSpc>
+            </a:pPr>
+            <a:r>
+              <a:rPr sz="900" b="1" i="0" spc="250">
+                <a:solidFill>
+                  <a:srgbClr val="26231F"/>
+                </a:solidFill>
+              </a:rPr>
+              <a:t>FIRST BIRTHDAY</a:t>
+            </a:r>
+          </a:p>
+        </p:txBody>
+      </p:sp>
+      <p:sp>
+        <p:nvSpPr>
+          <p:cNvPr id="5" name="포인트"/>
+          <p:cNvSpPr/>
+          <p:nvPr/>
+        </p:nvSpPr>
+        <p:spPr>
+          <a:xfrm>
+            <a:off x="11204143" y="246888"/>
+            <a:ext cx="237744" cy="237744"/>
+          </a:xfrm>
+          <a:prstGeom prst="mathPlus">
+            <a:avLst/>
+          </a:prstGeom>
+          <a:solidFill>
+            <a:srgbClr val="7BC9EA"/>
+          </a:solidFill>
+          <a:ln>
+            <a:noFill/>
+          </a:ln>
+        </p:spPr>
+        <p:txBody>
+          <a:bodyPr rtlCol="0" anchor="ctr"/>
+          <a:lstStyle/>
+          <a:p>
+            <a:pPr algn="ctr"/>
+          </a:p>
+        </p:txBody>
+      </p:sp>
+      <p:sp>
+        <p:nvSpPr>
           <p:cNvPr id="2" name="Title 1"/>
           <p:cNvSpPr>
             <a:spLocks noGrp="1"/>
@@ -4244,8 +4473,8 @@
         </p:nvSpPr>
         <p:spPr>
           <a:xfrm>
-            <a:off x="640080" y="411480"/>
-            <a:ext cx="8412242" cy="822960"/>
+            <a:off x="640080" y="731520"/>
+            <a:ext cx="10911535" cy="822960"/>
           </a:xfrm>
         </p:spPr>
         <p:txBody>
@@ -4262,7 +4491,7 @@
             <a:r>
               <a:rPr sz="3000" b="1" i="0">
                 <a:solidFill>
-                  <a:srgbClr val="FFFFFF"/>
+                  <a:srgbClr val="26231F"/>
                 </a:solidFill>
               </a:rPr>
               <a:t>첫 번째 생일 사진</a:t>
@@ -4272,14 +4501,14 @@
       </p:sp>
       <p:sp>
         <p:nvSpPr>
-          <p:cNvPr id="4" name="사진 자리"/>
+          <p:cNvPr id="6" name="사진 자리"/>
           <p:cNvSpPr/>
           <p:nvPr/>
         </p:nvSpPr>
         <p:spPr>
           <a:xfrm>
-            <a:off x="640080" y="1645920"/>
-            <a:ext cx="5318607" cy="4754880"/>
+            <a:off x="640080" y="1783080"/>
+            <a:ext cx="5318607" cy="4572000"/>
           </a:xfrm>
           <a:prstGeom prst="roundRect">
             <a:avLst>
@@ -4290,9 +4519,7 @@
             <a:srgbClr val="D1EEFA"/>
           </a:solidFill>
           <a:ln w="19050">
-            <a:solidFill>
-              <a:srgbClr val="2695C5"/>
-            </a:solidFill>
+            <a:noFill/>
             <a:prstDash val="dash"/>
           </a:ln>
         </p:spPr>
@@ -4310,7 +4537,7 @@
             <a:r>
               <a:rPr sz="1400" b="0" i="0">
                 <a:solidFill>
-                  <a:srgbClr val="11485F"/>
+                  <a:srgbClr val="8E8780"/>
                 </a:solidFill>
               </a:rPr>
               <a:t>대표 사진 1</a:t>
@@ -4320,14 +4547,14 @@
       </p:sp>
       <p:sp>
         <p:nvSpPr>
-          <p:cNvPr id="5" name="사진 자리"/>
+          <p:cNvPr id="7" name="사진 자리"/>
           <p:cNvSpPr/>
           <p:nvPr/>
         </p:nvSpPr>
         <p:spPr>
           <a:xfrm>
-            <a:off x="6233007" y="1645920"/>
-            <a:ext cx="5318607" cy="4754880"/>
+            <a:off x="6233007" y="1783080"/>
+            <a:ext cx="5318607" cy="4572000"/>
           </a:xfrm>
           <a:prstGeom prst="roundRect">
             <a:avLst>
@@ -4338,9 +4565,7 @@
             <a:srgbClr val="D1EEFA"/>
           </a:solidFill>
           <a:ln w="19050">
-            <a:solidFill>
-              <a:srgbClr val="2695C5"/>
-            </a:solidFill>
+            <a:noFill/>
             <a:prstDash val="dash"/>
           </a:ln>
         </p:spPr>
@@ -4358,7 +4583,7 @@
             <a:r>
               <a:rPr sz="1400" b="0" i="0">
                 <a:solidFill>
-                  <a:srgbClr val="11485F"/>
+                  <a:srgbClr val="8E8780"/>
                 </a:solidFill>
               </a:rPr>
               <a:t>대표 사진 2</a:t>
@@ -4400,14 +4625,14 @@
         </p:nvSpPr>
         <p:spPr>
           <a:xfrm>
-            <a:off x="0" y="384048"/>
-            <a:ext cx="9509522" cy="896112"/>
-          </a:xfrm>
-          <a:prstGeom prst="homePlate">
+            <a:off x="640080" y="566928"/>
+            <a:ext cx="10911535" cy="10972"/>
+          </a:xfrm>
+          <a:prstGeom prst="rect">
             <a:avLst/>
           </a:prstGeom>
           <a:solidFill>
-            <a:srgbClr val="2695C5"/>
+            <a:srgbClr val="26231F"/>
           </a:solidFill>
           <a:ln>
             <a:noFill/>
@@ -4423,6 +4648,73 @@
       </p:sp>
       <p:sp>
         <p:nvSpPr>
+          <p:cNvPr id="4" name="상단 라벨"/>
+          <p:cNvSpPr txBox="1"/>
+          <p:nvPr/>
+        </p:nvSpPr>
+        <p:spPr>
+          <a:xfrm>
+            <a:off x="640080" y="237744"/>
+            <a:ext cx="5486400" cy="274320"/>
+          </a:xfrm>
+          <a:prstGeom prst="rect">
+            <a:avLst/>
+          </a:prstGeom>
+          <a:noFill/>
+        </p:spPr>
+        <p:txBody>
+          <a:bodyPr wrap="square" lIns="54864" rIns="54864" tIns="27432" bIns="27432" anchor="ctr">
+            <a:noAutofit/>
+          </a:bodyPr>
+          <a:lstStyle/>
+          <a:p>
+            <a:pPr algn="l">
+              <a:lnSpc>
+                <a:spcPct val="115000"/>
+              </a:lnSpc>
+            </a:pPr>
+            <a:r>
+              <a:rPr sz="900" b="1" i="0" spc="250">
+                <a:solidFill>
+                  <a:srgbClr val="26231F"/>
+                </a:solidFill>
+              </a:rPr>
+              <a:t>FIRST BIRTHDAY</a:t>
+            </a:r>
+          </a:p>
+        </p:txBody>
+      </p:sp>
+      <p:sp>
+        <p:nvSpPr>
+          <p:cNvPr id="5" name="포인트"/>
+          <p:cNvSpPr/>
+          <p:nvPr/>
+        </p:nvSpPr>
+        <p:spPr>
+          <a:xfrm>
+            <a:off x="11204143" y="246888"/>
+            <a:ext cx="237744" cy="237744"/>
+          </a:xfrm>
+          <a:prstGeom prst="mathPlus">
+            <a:avLst/>
+          </a:prstGeom>
+          <a:solidFill>
+            <a:srgbClr val="7BC9EA"/>
+          </a:solidFill>
+          <a:ln>
+            <a:noFill/>
+          </a:ln>
+        </p:spPr>
+        <p:txBody>
+          <a:bodyPr rtlCol="0" anchor="ctr"/>
+          <a:lstStyle/>
+          <a:p>
+            <a:pPr algn="ctr"/>
+          </a:p>
+        </p:txBody>
+      </p:sp>
+      <p:sp>
+        <p:nvSpPr>
           <p:cNvPr id="2" name="Title 1"/>
           <p:cNvSpPr>
             <a:spLocks noGrp="1"/>
@@ -4433,8 +4725,8 @@
         </p:nvSpPr>
         <p:spPr>
           <a:xfrm>
-            <a:off x="640080" y="411480"/>
-            <a:ext cx="8412242" cy="822960"/>
+            <a:off x="640080" y="731520"/>
+            <a:ext cx="10911535" cy="822960"/>
           </a:xfrm>
         </p:spPr>
         <p:txBody>
@@ -4451,7 +4743,7 @@
             <a:r>
               <a:rPr sz="3000" b="1" i="0">
                 <a:solidFill>
-                  <a:srgbClr val="FFFFFF"/>
+                  <a:srgbClr val="26231F"/>
                 </a:solidFill>
               </a:rPr>
               <a:t>한 해의 순간들</a:t>
@@ -4461,14 +4753,14 @@
       </p:sp>
       <p:sp>
         <p:nvSpPr>
-          <p:cNvPr id="4" name="사진 자리"/>
+          <p:cNvPr id="6" name="사진 자리"/>
           <p:cNvSpPr/>
           <p:nvPr/>
         </p:nvSpPr>
         <p:spPr>
           <a:xfrm>
-            <a:off x="640080" y="1645920"/>
-            <a:ext cx="3515258" cy="2286000"/>
+            <a:off x="640080" y="1783080"/>
+            <a:ext cx="3515258" cy="2194560"/>
           </a:xfrm>
           <a:prstGeom prst="roundRect">
             <a:avLst>
@@ -4479,9 +4771,7 @@
             <a:srgbClr val="D1EEFA"/>
           </a:solidFill>
           <a:ln w="19050">
-            <a:solidFill>
-              <a:srgbClr val="2695C5"/>
-            </a:solidFill>
+            <a:noFill/>
             <a:prstDash val="dash"/>
           </a:ln>
         </p:spPr>
@@ -4499,7 +4789,7 @@
             <a:r>
               <a:rPr sz="1200" b="0" i="0">
                 <a:solidFill>
-                  <a:srgbClr val="11485F"/>
+                  <a:srgbClr val="8E8780"/>
                 </a:solidFill>
               </a:rPr>
               <a:t>사진 1</a:t>
@@ -4509,14 +4799,14 @@
       </p:sp>
       <p:sp>
         <p:nvSpPr>
-          <p:cNvPr id="5" name="사진 자리"/>
+          <p:cNvPr id="7" name="사진 자리"/>
           <p:cNvSpPr/>
           <p:nvPr/>
         </p:nvSpPr>
         <p:spPr>
           <a:xfrm>
-            <a:off x="4338218" y="1645920"/>
-            <a:ext cx="3515258" cy="2286000"/>
+            <a:off x="4338218" y="1783080"/>
+            <a:ext cx="3515258" cy="2194560"/>
           </a:xfrm>
           <a:prstGeom prst="roundRect">
             <a:avLst>
@@ -4527,9 +4817,7 @@
             <a:srgbClr val="D1EEFA"/>
           </a:solidFill>
           <a:ln w="19050">
-            <a:solidFill>
-              <a:srgbClr val="2695C5"/>
-            </a:solidFill>
+            <a:noFill/>
             <a:prstDash val="dash"/>
           </a:ln>
         </p:spPr>
@@ -4547,7 +4835,7 @@
             <a:r>
               <a:rPr sz="1200" b="0" i="0">
                 <a:solidFill>
-                  <a:srgbClr val="11485F"/>
+                  <a:srgbClr val="8E8780"/>
                 </a:solidFill>
               </a:rPr>
               <a:t>사진 2</a:t>
@@ -4557,14 +4845,14 @@
       </p:sp>
       <p:sp>
         <p:nvSpPr>
-          <p:cNvPr id="6" name="사진 자리"/>
+          <p:cNvPr id="8" name="사진 자리"/>
           <p:cNvSpPr/>
           <p:nvPr/>
         </p:nvSpPr>
         <p:spPr>
           <a:xfrm>
-            <a:off x="8036356" y="1645920"/>
-            <a:ext cx="3515258" cy="2286000"/>
+            <a:off x="8036356" y="1783080"/>
+            <a:ext cx="3515258" cy="2194560"/>
           </a:xfrm>
           <a:prstGeom prst="roundRect">
             <a:avLst>
@@ -4575,9 +4863,7 @@
             <a:srgbClr val="D1EEFA"/>
           </a:solidFill>
           <a:ln w="19050">
-            <a:solidFill>
-              <a:srgbClr val="2695C5"/>
-            </a:solidFill>
+            <a:noFill/>
             <a:prstDash val="dash"/>
           </a:ln>
         </p:spPr>
@@ -4595,7 +4881,7 @@
             <a:r>
               <a:rPr sz="1200" b="0" i="0">
                 <a:solidFill>
-                  <a:srgbClr val="11485F"/>
+                  <a:srgbClr val="8E8780"/>
                 </a:solidFill>
               </a:rPr>
               <a:t>사진 3</a:t>
@@ -4605,14 +4891,14 @@
       </p:sp>
       <p:sp>
         <p:nvSpPr>
-          <p:cNvPr id="7" name="사진 자리"/>
+          <p:cNvPr id="9" name="사진 자리"/>
           <p:cNvSpPr/>
           <p:nvPr/>
         </p:nvSpPr>
         <p:spPr>
           <a:xfrm>
-            <a:off x="640080" y="4114800"/>
-            <a:ext cx="3515258" cy="2286000"/>
+            <a:off x="640080" y="4160520"/>
+            <a:ext cx="3515258" cy="2194560"/>
           </a:xfrm>
           <a:prstGeom prst="roundRect">
             <a:avLst>
@@ -4623,9 +4909,7 @@
             <a:srgbClr val="D1EEFA"/>
           </a:solidFill>
           <a:ln w="19050">
-            <a:solidFill>
-              <a:srgbClr val="2695C5"/>
-            </a:solidFill>
+            <a:noFill/>
             <a:prstDash val="dash"/>
           </a:ln>
         </p:spPr>
@@ -4643,7 +4927,7 @@
             <a:r>
               <a:rPr sz="1200" b="0" i="0">
                 <a:solidFill>
-                  <a:srgbClr val="11485F"/>
+                  <a:srgbClr val="8E8780"/>
                 </a:solidFill>
               </a:rPr>
               <a:t>사진 4</a:t>
@@ -4653,14 +4937,14 @@
       </p:sp>
       <p:sp>
         <p:nvSpPr>
-          <p:cNvPr id="8" name="사진 자리"/>
+          <p:cNvPr id="10" name="사진 자리"/>
           <p:cNvSpPr/>
           <p:nvPr/>
         </p:nvSpPr>
         <p:spPr>
           <a:xfrm>
-            <a:off x="4338218" y="4114800"/>
-            <a:ext cx="3515258" cy="2286000"/>
+            <a:off x="4338218" y="4160520"/>
+            <a:ext cx="3515258" cy="2194560"/>
           </a:xfrm>
           <a:prstGeom prst="roundRect">
             <a:avLst>
@@ -4671,9 +4955,7 @@
             <a:srgbClr val="D1EEFA"/>
           </a:solidFill>
           <a:ln w="19050">
-            <a:solidFill>
-              <a:srgbClr val="2695C5"/>
-            </a:solidFill>
+            <a:noFill/>
             <a:prstDash val="dash"/>
           </a:ln>
         </p:spPr>
@@ -4691,7 +4973,7 @@
             <a:r>
               <a:rPr sz="1200" b="0" i="0">
                 <a:solidFill>
-                  <a:srgbClr val="11485F"/>
+                  <a:srgbClr val="8E8780"/>
                 </a:solidFill>
               </a:rPr>
               <a:t>사진 5</a:t>
@@ -4701,14 +4983,14 @@
       </p:sp>
       <p:sp>
         <p:nvSpPr>
-          <p:cNvPr id="9" name="사진 자리"/>
+          <p:cNvPr id="11" name="사진 자리"/>
           <p:cNvSpPr/>
           <p:nvPr/>
         </p:nvSpPr>
         <p:spPr>
           <a:xfrm>
-            <a:off x="8036356" y="4114800"/>
-            <a:ext cx="3515258" cy="2286000"/>
+            <a:off x="8036356" y="4160520"/>
+            <a:ext cx="3515258" cy="2194560"/>
           </a:xfrm>
           <a:prstGeom prst="roundRect">
             <a:avLst>
@@ -4719,9 +5001,7 @@
             <a:srgbClr val="D1EEFA"/>
           </a:solidFill>
           <a:ln w="19050">
-            <a:solidFill>
-              <a:srgbClr val="2695C5"/>
-            </a:solidFill>
+            <a:noFill/>
             <a:prstDash val="dash"/>
           </a:ln>
         </p:spPr>
@@ -4739,7 +5019,7 @@
             <a:r>
               <a:rPr sz="1200" b="0" i="0">
                 <a:solidFill>
-                  <a:srgbClr val="11485F"/>
+                  <a:srgbClr val="8E8780"/>
                 </a:solidFill>
               </a:rPr>
               <a:t>사진 6</a:t>
@@ -4781,14 +5061,14 @@
         </p:nvSpPr>
         <p:spPr>
           <a:xfrm>
-            <a:off x="0" y="384048"/>
-            <a:ext cx="9509522" cy="896112"/>
-          </a:xfrm>
-          <a:prstGeom prst="homePlate">
+            <a:off x="640080" y="566928"/>
+            <a:ext cx="10911535" cy="10972"/>
+          </a:xfrm>
+          <a:prstGeom prst="rect">
             <a:avLst/>
           </a:prstGeom>
           <a:solidFill>
-            <a:srgbClr val="2695C5"/>
+            <a:srgbClr val="26231F"/>
           </a:solidFill>
           <a:ln>
             <a:noFill/>
@@ -4804,6 +5084,73 @@
       </p:sp>
       <p:sp>
         <p:nvSpPr>
+          <p:cNvPr id="4" name="상단 라벨"/>
+          <p:cNvSpPr txBox="1"/>
+          <p:nvPr/>
+        </p:nvSpPr>
+        <p:spPr>
+          <a:xfrm>
+            <a:off x="640080" y="237744"/>
+            <a:ext cx="5486400" cy="274320"/>
+          </a:xfrm>
+          <a:prstGeom prst="rect">
+            <a:avLst/>
+          </a:prstGeom>
+          <a:noFill/>
+        </p:spPr>
+        <p:txBody>
+          <a:bodyPr wrap="square" lIns="54864" rIns="54864" tIns="27432" bIns="27432" anchor="ctr">
+            <a:noAutofit/>
+          </a:bodyPr>
+          <a:lstStyle/>
+          <a:p>
+            <a:pPr algn="l">
+              <a:lnSpc>
+                <a:spcPct val="115000"/>
+              </a:lnSpc>
+            </a:pPr>
+            <a:r>
+              <a:rPr sz="900" b="1" i="0" spc="250">
+                <a:solidFill>
+                  <a:srgbClr val="26231F"/>
+                </a:solidFill>
+              </a:rPr>
+              <a:t>FIRST BIRTHDAY</a:t>
+            </a:r>
+          </a:p>
+        </p:txBody>
+      </p:sp>
+      <p:sp>
+        <p:nvSpPr>
+          <p:cNvPr id="5" name="포인트"/>
+          <p:cNvSpPr/>
+          <p:nvPr/>
+        </p:nvSpPr>
+        <p:spPr>
+          <a:xfrm>
+            <a:off x="11204143" y="246888"/>
+            <a:ext cx="237744" cy="237744"/>
+          </a:xfrm>
+          <a:prstGeom prst="mathPlus">
+            <a:avLst/>
+          </a:prstGeom>
+          <a:solidFill>
+            <a:srgbClr val="7BC9EA"/>
+          </a:solidFill>
+          <a:ln>
+            <a:noFill/>
+          </a:ln>
+        </p:spPr>
+        <p:txBody>
+          <a:bodyPr rtlCol="0" anchor="ctr"/>
+          <a:lstStyle/>
+          <a:p>
+            <a:pPr algn="ctr"/>
+          </a:p>
+        </p:txBody>
+      </p:sp>
+      <p:sp>
+        <p:nvSpPr>
           <p:cNvPr id="2" name="Title 1"/>
           <p:cNvSpPr>
             <a:spLocks noGrp="1"/>
@@ -4814,8 +5161,8 @@
         </p:nvSpPr>
         <p:spPr>
           <a:xfrm>
-            <a:off x="640080" y="411480"/>
-            <a:ext cx="8412242" cy="822960"/>
+            <a:off x="640080" y="731520"/>
+            <a:ext cx="10911535" cy="822960"/>
           </a:xfrm>
         </p:spPr>
         <p:txBody>
@@ -4832,7 +5179,7 @@
             <a:r>
               <a:rPr sz="3000" b="1" i="0">
                 <a:solidFill>
-                  <a:srgbClr val="FFFFFF"/>
+                  <a:srgbClr val="26231F"/>
                 </a:solidFill>
               </a:rPr>
               <a:t>사진 모음</a:t>
@@ -4842,14 +5189,14 @@
       </p:sp>
       <p:sp>
         <p:nvSpPr>
-          <p:cNvPr id="4" name="사진 자리"/>
+          <p:cNvPr id="6" name="사진 자리"/>
           <p:cNvSpPr/>
           <p:nvPr/>
         </p:nvSpPr>
         <p:spPr>
           <a:xfrm>
-            <a:off x="640080" y="1645920"/>
-            <a:ext cx="2590723" cy="2286000"/>
+            <a:off x="640080" y="1783080"/>
+            <a:ext cx="2590723" cy="2194560"/>
           </a:xfrm>
           <a:prstGeom prst="roundRect">
             <a:avLst>
@@ -4860,9 +5207,7 @@
             <a:srgbClr val="D1EEFA"/>
           </a:solidFill>
           <a:ln w="19050">
-            <a:solidFill>
-              <a:srgbClr val="2695C5"/>
-            </a:solidFill>
+            <a:noFill/>
             <a:prstDash val="dash"/>
           </a:ln>
         </p:spPr>
@@ -4880,7 +5225,7 @@
             <a:r>
               <a:rPr sz="1200" b="0" i="0">
                 <a:solidFill>
-                  <a:srgbClr val="11485F"/>
+                  <a:srgbClr val="8E8780"/>
                 </a:solidFill>
               </a:rPr>
               <a:t>사진 1</a:t>
@@ -4890,14 +5235,14 @@
       </p:sp>
       <p:sp>
         <p:nvSpPr>
-          <p:cNvPr id="5" name="사진 자리"/>
+          <p:cNvPr id="7" name="사진 자리"/>
           <p:cNvSpPr/>
           <p:nvPr/>
         </p:nvSpPr>
         <p:spPr>
           <a:xfrm>
-            <a:off x="3413683" y="1645920"/>
-            <a:ext cx="2590723" cy="2286000"/>
+            <a:off x="3413683" y="1783080"/>
+            <a:ext cx="2590723" cy="2194560"/>
           </a:xfrm>
           <a:prstGeom prst="roundRect">
             <a:avLst>
@@ -4908,9 +5253,7 @@
             <a:srgbClr val="D1EEFA"/>
           </a:solidFill>
           <a:ln w="19050">
-            <a:solidFill>
-              <a:srgbClr val="2695C5"/>
-            </a:solidFill>
+            <a:noFill/>
             <a:prstDash val="dash"/>
           </a:ln>
         </p:spPr>
@@ -4928,7 +5271,7 @@
             <a:r>
               <a:rPr sz="1200" b="0" i="0">
                 <a:solidFill>
-                  <a:srgbClr val="11485F"/>
+                  <a:srgbClr val="8E8780"/>
                 </a:solidFill>
               </a:rPr>
               <a:t>사진 2</a:t>
@@ -4938,14 +5281,14 @@
       </p:sp>
       <p:sp>
         <p:nvSpPr>
-          <p:cNvPr id="6" name="사진 자리"/>
+          <p:cNvPr id="8" name="사진 자리"/>
           <p:cNvSpPr/>
           <p:nvPr/>
         </p:nvSpPr>
         <p:spPr>
           <a:xfrm>
-            <a:off x="6187287" y="1645920"/>
-            <a:ext cx="2590723" cy="2286000"/>
+            <a:off x="6187287" y="1783080"/>
+            <a:ext cx="2590723" cy="2194560"/>
           </a:xfrm>
           <a:prstGeom prst="roundRect">
             <a:avLst>
@@ -4956,9 +5299,7 @@
             <a:srgbClr val="D1EEFA"/>
           </a:solidFill>
           <a:ln w="19050">
-            <a:solidFill>
-              <a:srgbClr val="2695C5"/>
-            </a:solidFill>
+            <a:noFill/>
             <a:prstDash val="dash"/>
           </a:ln>
         </p:spPr>
@@ -4976,7 +5317,7 @@
             <a:r>
               <a:rPr sz="1200" b="0" i="0">
                 <a:solidFill>
-                  <a:srgbClr val="11485F"/>
+                  <a:srgbClr val="8E8780"/>
                 </a:solidFill>
               </a:rPr>
               <a:t>사진 3</a:t>
@@ -4986,14 +5327,14 @@
       </p:sp>
       <p:sp>
         <p:nvSpPr>
-          <p:cNvPr id="7" name="사진 자리"/>
+          <p:cNvPr id="9" name="사진 자리"/>
           <p:cNvSpPr/>
           <p:nvPr/>
         </p:nvSpPr>
         <p:spPr>
           <a:xfrm>
-            <a:off x="8960891" y="1645920"/>
-            <a:ext cx="2590723" cy="2286000"/>
+            <a:off x="8960891" y="1783080"/>
+            <a:ext cx="2590723" cy="2194560"/>
           </a:xfrm>
           <a:prstGeom prst="roundRect">
             <a:avLst>
@@ -5004,9 +5345,7 @@
             <a:srgbClr val="D1EEFA"/>
           </a:solidFill>
           <a:ln w="19050">
-            <a:solidFill>
-              <a:srgbClr val="2695C5"/>
-            </a:solidFill>
+            <a:noFill/>
             <a:prstDash val="dash"/>
           </a:ln>
         </p:spPr>
@@ -5024,7 +5363,7 @@
             <a:r>
               <a:rPr sz="1200" b="0" i="0">
                 <a:solidFill>
-                  <a:srgbClr val="11485F"/>
+                  <a:srgbClr val="8E8780"/>
                 </a:solidFill>
               </a:rPr>
               <a:t>사진 4</a:t>
@@ -5034,14 +5373,14 @@
       </p:sp>
       <p:sp>
         <p:nvSpPr>
-          <p:cNvPr id="8" name="사진 자리"/>
+          <p:cNvPr id="10" name="사진 자리"/>
           <p:cNvSpPr/>
           <p:nvPr/>
         </p:nvSpPr>
         <p:spPr>
           <a:xfrm>
-            <a:off x="640080" y="4114800"/>
-            <a:ext cx="2590723" cy="2286000"/>
+            <a:off x="640080" y="4160520"/>
+            <a:ext cx="2590723" cy="2194560"/>
           </a:xfrm>
           <a:prstGeom prst="roundRect">
             <a:avLst>
@@ -5052,9 +5391,7 @@
             <a:srgbClr val="D1EEFA"/>
           </a:solidFill>
           <a:ln w="19050">
-            <a:solidFill>
-              <a:srgbClr val="2695C5"/>
-            </a:solidFill>
+            <a:noFill/>
             <a:prstDash val="dash"/>
           </a:ln>
         </p:spPr>
@@ -5072,7 +5409,7 @@
             <a:r>
               <a:rPr sz="1200" b="0" i="0">
                 <a:solidFill>
-                  <a:srgbClr val="11485F"/>
+                  <a:srgbClr val="8E8780"/>
                 </a:solidFill>
               </a:rPr>
               <a:t>사진 5</a:t>
@@ -5082,14 +5419,14 @@
       </p:sp>
       <p:sp>
         <p:nvSpPr>
-          <p:cNvPr id="9" name="사진 자리"/>
+          <p:cNvPr id="11" name="사진 자리"/>
           <p:cNvSpPr/>
           <p:nvPr/>
         </p:nvSpPr>
         <p:spPr>
           <a:xfrm>
-            <a:off x="3413683" y="4114800"/>
-            <a:ext cx="2590723" cy="2286000"/>
+            <a:off x="3413683" y="4160520"/>
+            <a:ext cx="2590723" cy="2194560"/>
           </a:xfrm>
           <a:prstGeom prst="roundRect">
             <a:avLst>
@@ -5100,9 +5437,7 @@
             <a:srgbClr val="D1EEFA"/>
           </a:solidFill>
           <a:ln w="19050">
-            <a:solidFill>
-              <a:srgbClr val="2695C5"/>
-            </a:solidFill>
+            <a:noFill/>
             <a:prstDash val="dash"/>
           </a:ln>
         </p:spPr>
@@ -5120,7 +5455,7 @@
             <a:r>
               <a:rPr sz="1200" b="0" i="0">
                 <a:solidFill>
-                  <a:srgbClr val="11485F"/>
+                  <a:srgbClr val="8E8780"/>
                 </a:solidFill>
               </a:rPr>
               <a:t>사진 6</a:t>
@@ -5130,14 +5465,14 @@
       </p:sp>
       <p:sp>
         <p:nvSpPr>
-          <p:cNvPr id="10" name="사진 자리"/>
+          <p:cNvPr id="12" name="사진 자리"/>
           <p:cNvSpPr/>
           <p:nvPr/>
         </p:nvSpPr>
         <p:spPr>
           <a:xfrm>
-            <a:off x="6187287" y="4114800"/>
-            <a:ext cx="2590723" cy="2286000"/>
+            <a:off x="6187287" y="4160520"/>
+            <a:ext cx="2590723" cy="2194560"/>
           </a:xfrm>
           <a:prstGeom prst="roundRect">
             <a:avLst>
@@ -5148,9 +5483,7 @@
             <a:srgbClr val="D1EEFA"/>
           </a:solidFill>
           <a:ln w="19050">
-            <a:solidFill>
-              <a:srgbClr val="2695C5"/>
-            </a:solidFill>
+            <a:noFill/>
             <a:prstDash val="dash"/>
           </a:ln>
         </p:spPr>
@@ -5168,7 +5501,7 @@
             <a:r>
               <a:rPr sz="1200" b="0" i="0">
                 <a:solidFill>
-                  <a:srgbClr val="11485F"/>
+                  <a:srgbClr val="8E8780"/>
                 </a:solidFill>
               </a:rPr>
               <a:t>사진 7</a:t>
@@ -5178,14 +5511,14 @@
       </p:sp>
       <p:sp>
         <p:nvSpPr>
-          <p:cNvPr id="11" name="사진 자리"/>
+          <p:cNvPr id="13" name="사진 자리"/>
           <p:cNvSpPr/>
           <p:nvPr/>
         </p:nvSpPr>
         <p:spPr>
           <a:xfrm>
-            <a:off x="8960891" y="4114800"/>
-            <a:ext cx="2590723" cy="2286000"/>
+            <a:off x="8960891" y="4160520"/>
+            <a:ext cx="2590723" cy="2194560"/>
           </a:xfrm>
           <a:prstGeom prst="roundRect">
             <a:avLst>
@@ -5196,9 +5529,7 @@
             <a:srgbClr val="D1EEFA"/>
           </a:solidFill>
           <a:ln w="19050">
-            <a:solidFill>
-              <a:srgbClr val="2695C5"/>
-            </a:solidFill>
+            <a:noFill/>
             <a:prstDash val="dash"/>
           </a:ln>
         </p:spPr>
@@ -5216,7 +5547,7 @@
             <a:r>
               <a:rPr sz="1200" b="0" i="0">
                 <a:solidFill>
-                  <a:srgbClr val="11485F"/>
+                  <a:srgbClr val="8E8780"/>
                 </a:solidFill>
               </a:rPr>
               <a:t>사진 8</a:t>
@@ -5235,6 +5566,14 @@
 <file path=ppt/slides/slide6.xml><?xml version="1.0" encoding="utf-8"?>
 <p:sld xmlns:a="http://schemas.openxmlformats.org/drawingml/2006/main" xmlns:p="http://schemas.openxmlformats.org/presentationml/2006/main" xmlns:r="http://schemas.openxmlformats.org/officeDocument/2006/relationships">
   <p:cSld>
+    <p:bg>
+      <p:bgPr>
+        <a:solidFill>
+          <a:srgbClr val="EAF7FD"/>
+        </a:solidFill>
+        <a:effectLst/>
+      </p:bgPr>
+    </p:bg>
     <p:spTree>
       <p:nvGrpSpPr>
         <p:cNvPr id="1" name=""/>
@@ -5242,30 +5581,119 @@
         <p:nvPr/>
       </p:nvGrpSpPr>
       <p:grpSpPr/>
-      <p:pic>
-        <p:nvPicPr>
-          <p:cNvPr id="3" name="표지 그림" descr="birthday-18.jpg"/>
-          <p:cNvPicPr>
-            <a:picLocks noChangeAspect="1"/>
-          </p:cNvPicPr>
+      <p:sp>
+        <p:nvSpPr>
+          <p:cNvPr id="3" name="사진 자리"/>
+          <p:cNvSpPr/>
           <p:nvPr/>
-        </p:nvPicPr>
-        <p:blipFill>
-          <a:blip r:embed="rId2"/>
-          <a:stretch>
-            <a:fillRect/>
-          </a:stretch>
-        </p:blipFill>
-        <p:spPr>
-          <a:xfrm>
-            <a:off x="0" y="0"/>
-            <a:ext cx="12191695" cy="6858000"/>
+        </p:nvSpPr>
+        <p:spPr>
+          <a:xfrm>
+            <a:off x="1463003" y="685800"/>
+            <a:ext cx="3169840" cy="5486400"/>
+          </a:xfrm>
+          <a:prstGeom prst="round2SameRect">
+            <a:avLst>
+              <a:gd name="adj1" fmla="val 50000"/>
+              <a:gd name="adj2" fmla="val 0"/>
+            </a:avLst>
+          </a:prstGeom>
+          <a:solidFill>
+            <a:srgbClr val="A5DCF3"/>
+          </a:solidFill>
+          <a:ln>
+            <a:noFill/>
+          </a:ln>
+        </p:spPr>
+        <p:txBody>
+          <a:bodyPr rtlCol="0" anchor="ctr" wrap="square" lIns="54864" rIns="54864" tIns="27432" bIns="27432">
+            <a:noAutofit/>
+          </a:bodyPr>
+          <a:lstStyle/>
+          <a:p>
+            <a:pPr algn="ctr">
+              <a:lnSpc>
+                <a:spcPct val="100000"/>
+              </a:lnSpc>
+            </a:pPr>
+            <a:r>
+              <a:rPr sz="1400" b="0" i="0">
+                <a:solidFill>
+                  <a:srgbClr val="273F49"/>
+                </a:solidFill>
+              </a:rPr>
+              <a:t>사진을 넣어 주세요</a:t>
+            </a:r>
+          </a:p>
+        </p:txBody>
+      </p:sp>
+      <p:sp>
+        <p:nvSpPr>
+          <p:cNvPr id="4" name="장식"/>
+          <p:cNvSpPr/>
+          <p:nvPr/>
+        </p:nvSpPr>
+        <p:spPr>
+          <a:xfrm>
+            <a:off x="4358505" y="4251960"/>
+            <a:ext cx="1005840" cy="1005840"/>
+          </a:xfrm>
+          <a:prstGeom prst="ellipse">
+            <a:avLst/>
+          </a:prstGeom>
+          <a:solidFill>
+            <a:srgbClr val="A5DCF3"/>
+          </a:solidFill>
+          <a:ln>
+            <a:noFill/>
+          </a:ln>
+        </p:spPr>
+        <p:txBody>
+          <a:bodyPr rtlCol="0" anchor="ctr"/>
+          <a:lstStyle/>
+          <a:p>
+            <a:pPr algn="ctr"/>
+          </a:p>
+        </p:txBody>
+      </p:sp>
+      <p:sp>
+        <p:nvSpPr>
+          <p:cNvPr id="5" name="라벨"/>
+          <p:cNvSpPr txBox="1"/>
+          <p:nvPr/>
+        </p:nvSpPr>
+        <p:spPr>
+          <a:xfrm>
+            <a:off x="6827349" y="2148840"/>
+            <a:ext cx="4632844" cy="274320"/>
           </a:xfrm>
           <a:prstGeom prst="rect">
             <a:avLst/>
           </a:prstGeom>
-        </p:spPr>
-      </p:pic>
+          <a:noFill/>
+        </p:spPr>
+        <p:txBody>
+          <a:bodyPr wrap="square" lIns="54864" rIns="54864" tIns="27432" bIns="27432" anchor="t">
+            <a:noAutofit/>
+          </a:bodyPr>
+          <a:lstStyle/>
+          <a:p>
+            <a:pPr algn="l">
+              <a:lnSpc>
+                <a:spcPct val="115000"/>
+              </a:lnSpc>
+            </a:pPr>
+            <a:r>
+              <a:rPr sz="1000" b="1" i="0" spc="250">
+                <a:solidFill>
+                  <a:srgbClr val="26231F"/>
+                </a:solidFill>
+              </a:rPr>
+              <a:t>FIRST BIRTHDAY</a:t>
+            </a:r>
+          </a:p>
+        </p:txBody>
+      </p:sp>
       <p:sp>
         <p:nvSpPr>
           <p:cNvPr id="2" name="Title 1"/>
@@ -5278,8 +5706,8 @@
         </p:nvSpPr>
         <p:spPr>
           <a:xfrm>
-            <a:off x="853418" y="2057400"/>
-            <a:ext cx="6095847" cy="1554480"/>
+            <a:off x="6827349" y="2606040"/>
+            <a:ext cx="4632844" cy="1188720"/>
           </a:xfrm>
         </p:spPr>
         <p:txBody>
@@ -5296,7 +5724,7 @@
             <a:r>
               <a:rPr sz="3400" b="1" i="0">
                 <a:solidFill>
-                  <a:srgbClr val="11485F"/>
+                  <a:srgbClr val="26231F"/>
                 </a:solidFill>
               </a:rPr>
               <a:t>와 주셔서 고맙습니다</a:t>
@@ -5306,14 +5734,14 @@
       </p:sp>
       <p:sp>
         <p:nvSpPr>
-          <p:cNvPr id="4" name="한 줄 문구"/>
+          <p:cNvPr id="6" name="한 줄 문구"/>
           <p:cNvSpPr txBox="1"/>
           <p:nvPr/>
         </p:nvSpPr>
         <p:spPr>
           <a:xfrm>
-            <a:off x="853418" y="3749039"/>
-            <a:ext cx="6095847" cy="822960"/>
+            <a:off x="6827349" y="3886200"/>
+            <a:ext cx="4632844" cy="822960"/>
           </a:xfrm>
           <a:prstGeom prst="rect">
             <a:avLst/>
@@ -5332,9 +5760,9 @@
               </a:lnSpc>
             </a:pPr>
             <a:r>
-              <a:rPr sz="1700" b="0" i="1">
+              <a:rPr sz="1700" b="0" i="0">
                 <a:solidFill>
-                  <a:srgbClr val="11485F"/>
+                  <a:srgbClr val="26231F"/>
                 </a:solidFill>
               </a:rPr>
               <a:t>아이가 한 살이 되었습니다</a:t>
@@ -5344,14 +5772,14 @@
       </p:sp>
       <p:sp>
         <p:nvSpPr>
-          <p:cNvPr id="5" name="안내 문구"/>
+          <p:cNvPr id="7" name="안내 문구"/>
           <p:cNvSpPr txBox="1"/>
           <p:nvPr/>
         </p:nvSpPr>
         <p:spPr>
           <a:xfrm>
-            <a:off x="853418" y="4617720"/>
-            <a:ext cx="6095847" cy="914400"/>
+            <a:off x="6827349" y="4754880"/>
+            <a:ext cx="4632844" cy="914400"/>
           </a:xfrm>
           <a:prstGeom prst="rect">
             <a:avLst/>
@@ -5372,7 +5800,7 @@
             <a:r>
               <a:rPr sz="1400" b="0" i="0">
                 <a:solidFill>
-                  <a:srgbClr val="666666"/>
+                  <a:srgbClr val="26231F"/>
                 </a:solidFill>
               </a:rPr>
               <a:t>아기 이름 · 부모 이름</a:t>
@@ -5399,34 +5827,34 @@
         <a:sysClr val="window" lastClr="FFFFFF"/>
       </a:lt1>
       <a:dk2>
-        <a:srgbClr val="11485F"/>
+        <a:srgbClr val="273F49"/>
       </a:dk2>
       <a:lt2>
-        <a:srgbClr val="EEF8FC"/>
+        <a:srgbClr val="EAF7FD"/>
       </a:lt2>
       <a:accent1>
-        <a:srgbClr val="2695C5"/>
+        <a:srgbClr val="7BC9EA"/>
       </a:accent1>
       <a:accent2>
-        <a:srgbClr val="209DB6"/>
+        <a:srgbClr val="9FB1EF"/>
       </a:accent2>
       <a:accent3>
-        <a:srgbClr val="11485F"/>
+        <a:srgbClr val="273F49"/>
       </a:accent3>
       <a:accent4>
         <a:srgbClr val="D1EEFA"/>
       </a:accent4>
       <a:accent5>
-        <a:srgbClr val="2399BE"/>
+        <a:srgbClr val="8DBDEC"/>
       </a:accent5>
       <a:accent6>
-        <a:srgbClr val="70919F"/>
+        <a:srgbClr val="7D8C92"/>
       </a:accent6>
       <a:hlink>
-        <a:srgbClr val="2695C5"/>
+        <a:srgbClr val="7BC9EA"/>
       </a:hlink>
       <a:folHlink>
-        <a:srgbClr val="11485F"/>
+        <a:srgbClr val="273F49"/>
       </a:folHlink>
     </a:clrScheme>
     <a:fontScheme name="Office">
